--- a/ppt_engine/templates/solution_fixed_modules/轨道交通地铁全封闭声屏障（M1_&_M2）.pptx
+++ b/ppt_engine/templates/solution_fixed_modules/轨道交通地铁全封闭声屏障（M1_&_M2）.pptx
@@ -10,6 +10,7 @@
     <p:sldId id="258" r:id="rId4"/>
     <p:sldId id="259" r:id="rId5"/>
     <p:sldId id="260" r:id="rId6"/>
+    <p:sldId id="261" r:id="rId12"/>
   </p:sldIdLst>
   <p:notesMasterIdLst>
     <p:notesMasterId r:id="rId7"/>
@@ -1431,6 +1432,10 @@
           </a:solidFill>
           <a:ln/>
         </p:spPr>
+        <p:txBody>
+          <a:bodyPr/>
+          <a:p/>
+        </p:txBody>
       </p:sp>
       <p:sp>
         <p:nvSpPr>
@@ -1451,6 +1456,10 @@
           </a:solidFill>
           <a:ln/>
         </p:spPr>
+        <p:txBody>
+          <a:bodyPr/>
+          <a:p/>
+        </p:txBody>
       </p:sp>
       <p:sp>
         <p:nvSpPr>
@@ -1577,6 +1586,10 @@
           </a:solidFill>
           <a:ln/>
         </p:spPr>
+        <p:txBody>
+          <a:bodyPr/>
+          <a:p/>
+        </p:txBody>
       </p:sp>
       <p:sp>
         <p:nvSpPr>
@@ -1638,6 +1651,10 @@
           </a:solidFill>
           <a:ln/>
         </p:spPr>
+        <p:txBody>
+          <a:bodyPr/>
+          <a:p/>
+        </p:txBody>
       </p:sp>
       <p:sp>
         <p:nvSpPr>
@@ -1658,6 +1675,10 @@
           </a:solidFill>
           <a:ln/>
         </p:spPr>
+        <p:txBody>
+          <a:bodyPr/>
+          <a:p/>
+        </p:txBody>
       </p:sp>
       <p:sp>
         <p:nvSpPr>
@@ -1784,6 +1805,10 @@
           </a:solidFill>
           <a:ln/>
         </p:spPr>
+        <p:txBody>
+          <a:bodyPr/>
+          <a:p/>
+        </p:txBody>
       </p:sp>
       <p:sp>
         <p:nvSpPr>
@@ -1845,6 +1870,10 @@
           </a:solidFill>
           <a:ln/>
         </p:spPr>
+        <p:txBody>
+          <a:bodyPr/>
+          <a:p/>
+        </p:txBody>
       </p:sp>
       <p:sp>
         <p:nvSpPr>
@@ -1865,6 +1894,10 @@
           </a:solidFill>
           <a:ln/>
         </p:spPr>
+        <p:txBody>
+          <a:bodyPr/>
+          <a:p/>
+        </p:txBody>
       </p:sp>
       <p:sp>
         <p:nvSpPr>
@@ -1991,6 +2024,10 @@
           </a:solidFill>
           <a:ln/>
         </p:spPr>
+        <p:txBody>
+          <a:bodyPr/>
+          <a:p/>
+        </p:txBody>
       </p:sp>
       <p:sp>
         <p:nvSpPr>
@@ -2052,6 +2089,10 @@
           </a:solidFill>
           <a:ln/>
         </p:spPr>
+        <p:txBody>
+          <a:bodyPr/>
+          <a:p/>
+        </p:txBody>
       </p:sp>
       <p:pic>
         <p:nvPicPr>
@@ -2693,6 +2734,10 @@
             <a:prstDash val="solid"/>
           </a:ln>
         </p:spPr>
+        <p:txBody>
+          <a:bodyPr/>
+          <a:p/>
+        </p:txBody>
       </p:sp>
       <p:sp>
         <p:nvSpPr>
@@ -2713,6 +2758,10 @@
           </a:solidFill>
           <a:ln/>
         </p:spPr>
+        <p:txBody>
+          <a:bodyPr/>
+          <a:p/>
+        </p:txBody>
       </p:sp>
       <p:pic>
         <p:nvPicPr>
@@ -2839,6 +2888,10 @@
           </a:solidFill>
           <a:ln/>
         </p:spPr>
+        <p:txBody>
+          <a:bodyPr/>
+          <a:p/>
+        </p:txBody>
       </p:sp>
       <p:sp>
         <p:nvSpPr>
@@ -2903,6 +2956,10 @@
           </a:solidFill>
           <a:ln/>
         </p:spPr>
+        <p:txBody>
+          <a:bodyPr/>
+          <a:p/>
+        </p:txBody>
       </p:sp>
       <p:sp>
         <p:nvSpPr>
@@ -2967,6 +3024,10 @@
           </a:solidFill>
           <a:ln/>
         </p:spPr>
+        <p:txBody>
+          <a:bodyPr/>
+          <a:p/>
+        </p:txBody>
       </p:sp>
       <p:sp>
         <p:nvSpPr>
@@ -3031,6 +3092,10 @@
           </a:solidFill>
           <a:ln/>
         </p:spPr>
+        <p:txBody>
+          <a:bodyPr/>
+          <a:p/>
+        </p:txBody>
       </p:sp>
       <p:sp>
         <p:nvSpPr>
@@ -3251,6 +3316,10 @@
             <a:prstDash val="solid"/>
           </a:ln>
         </p:spPr>
+        <p:txBody>
+          <a:bodyPr/>
+          <a:p/>
+        </p:txBody>
       </p:sp>
       <p:sp>
         <p:nvSpPr>
@@ -3271,6 +3340,10 @@
           </a:solidFill>
           <a:ln/>
         </p:spPr>
+        <p:txBody>
+          <a:bodyPr/>
+          <a:p/>
+        </p:txBody>
       </p:sp>
       <p:pic>
         <p:nvPicPr>
@@ -3397,6 +3470,10 @@
           </a:solidFill>
           <a:ln/>
         </p:spPr>
+        <p:txBody>
+          <a:bodyPr/>
+          <a:p/>
+        </p:txBody>
       </p:sp>
       <p:sp>
         <p:nvSpPr>
@@ -3461,6 +3538,10 @@
           </a:solidFill>
           <a:ln/>
         </p:spPr>
+        <p:txBody>
+          <a:bodyPr/>
+          <a:p/>
+        </p:txBody>
       </p:sp>
       <p:sp>
         <p:nvSpPr>
@@ -3525,6 +3606,10 @@
           </a:solidFill>
           <a:ln/>
         </p:spPr>
+        <p:txBody>
+          <a:bodyPr/>
+          <a:p/>
+        </p:txBody>
       </p:sp>
       <p:sp>
         <p:nvSpPr>
@@ -3589,6 +3674,10 @@
           </a:solidFill>
           <a:ln/>
         </p:spPr>
+        <p:txBody>
+          <a:bodyPr/>
+          <a:p/>
+        </p:txBody>
       </p:sp>
       <p:sp>
         <p:nvSpPr>
@@ -3809,6 +3898,10 @@
             <a:prstDash val="solid"/>
           </a:ln>
         </p:spPr>
+        <p:txBody>
+          <a:bodyPr/>
+          <a:p/>
+        </p:txBody>
       </p:sp>
       <p:sp>
         <p:nvSpPr>
@@ -3829,6 +3922,10 @@
           </a:solidFill>
           <a:ln/>
         </p:spPr>
+        <p:txBody>
+          <a:bodyPr/>
+          <a:p/>
+        </p:txBody>
       </p:sp>
       <p:pic>
         <p:nvPicPr>
@@ -3955,6 +4052,10 @@
           </a:solidFill>
           <a:ln/>
         </p:spPr>
+        <p:txBody>
+          <a:bodyPr/>
+          <a:p/>
+        </p:txBody>
       </p:sp>
       <p:sp>
         <p:nvSpPr>
@@ -4019,6 +4120,10 @@
           </a:solidFill>
           <a:ln/>
         </p:spPr>
+        <p:txBody>
+          <a:bodyPr/>
+          <a:p/>
+        </p:txBody>
       </p:sp>
       <p:sp>
         <p:nvSpPr>
@@ -4261,6 +4366,10 @@
             <a:prstDash val="solid"/>
           </a:ln>
         </p:spPr>
+        <p:txBody>
+          <a:bodyPr/>
+          <a:p/>
+        </p:txBody>
       </p:sp>
       <p:sp>
         <p:nvSpPr>
@@ -4281,6 +4390,10 @@
           </a:solidFill>
           <a:ln/>
         </p:spPr>
+        <p:txBody>
+          <a:bodyPr/>
+          <a:p/>
+        </p:txBody>
       </p:sp>
       <p:pic>
         <p:nvPicPr>
@@ -4407,6 +4520,10 @@
           </a:solidFill>
           <a:ln/>
         </p:spPr>
+        <p:txBody>
+          <a:bodyPr/>
+          <a:p/>
+        </p:txBody>
       </p:sp>
       <p:sp>
         <p:nvSpPr>
@@ -4829,6 +4946,10 @@
             <a:prstDash val="solid"/>
           </a:ln>
         </p:spPr>
+        <p:txBody>
+          <a:bodyPr/>
+          <a:p/>
+        </p:txBody>
       </p:sp>
       <p:sp>
         <p:nvSpPr>
@@ -4849,6 +4970,10 @@
           </a:solidFill>
           <a:ln/>
         </p:spPr>
+        <p:txBody>
+          <a:bodyPr/>
+          <a:p/>
+        </p:txBody>
       </p:sp>
       <p:sp>
         <p:nvSpPr>
@@ -4869,6 +4994,10 @@
           </a:solidFill>
           <a:ln/>
         </p:spPr>
+        <p:txBody>
+          <a:bodyPr/>
+          <a:p/>
+        </p:txBody>
       </p:sp>
       <p:pic>
         <p:nvPicPr>
@@ -5041,6 +5170,10 @@
           </a:solidFill>
           <a:ln/>
         </p:spPr>
+        <p:txBody>
+          <a:bodyPr/>
+          <a:p/>
+        </p:txBody>
       </p:sp>
       <p:sp>
         <p:nvSpPr>
@@ -5061,6 +5194,10 @@
           </a:solidFill>
           <a:ln/>
         </p:spPr>
+        <p:txBody>
+          <a:bodyPr/>
+          <a:p/>
+        </p:txBody>
       </p:sp>
       <p:pic>
         <p:nvPicPr>
@@ -5146,6 +5283,10 @@
           </a:solidFill>
           <a:ln/>
         </p:spPr>
+        <p:txBody>
+          <a:bodyPr/>
+          <a:p/>
+        </p:txBody>
       </p:sp>
       <p:sp>
         <p:nvSpPr>
@@ -5166,6 +5307,10 @@
           </a:solidFill>
           <a:ln/>
         </p:spPr>
+        <p:txBody>
+          <a:bodyPr/>
+          <a:p/>
+        </p:txBody>
       </p:sp>
       <p:pic>
         <p:nvPicPr>
@@ -5251,6 +5396,10 @@
           </a:solidFill>
           <a:ln/>
         </p:spPr>
+        <p:txBody>
+          <a:bodyPr/>
+          <a:p/>
+        </p:txBody>
       </p:sp>
       <p:sp>
         <p:nvSpPr>
@@ -5271,6 +5420,10 @@
           </a:solidFill>
           <a:ln/>
         </p:spPr>
+        <p:txBody>
+          <a:bodyPr/>
+          <a:p/>
+        </p:txBody>
       </p:sp>
       <p:pic>
         <p:nvPicPr>
@@ -5361,6 +5514,10 @@
             <a:prstDash val="solid"/>
           </a:ln>
         </p:spPr>
+        <p:txBody>
+          <a:bodyPr/>
+          <a:p/>
+        </p:txBody>
       </p:sp>
       <p:sp>
         <p:nvSpPr>
@@ -5381,6 +5538,10 @@
           </a:solidFill>
           <a:ln/>
         </p:spPr>
+        <p:txBody>
+          <a:bodyPr/>
+          <a:p/>
+        </p:txBody>
       </p:sp>
       <p:sp>
         <p:nvSpPr>
@@ -5401,6 +5562,10 @@
           </a:solidFill>
           <a:ln/>
         </p:spPr>
+        <p:txBody>
+          <a:bodyPr/>
+          <a:p/>
+        </p:txBody>
       </p:sp>
       <p:pic>
         <p:nvPicPr>
@@ -5573,6 +5738,10 @@
           </a:solidFill>
           <a:ln/>
         </p:spPr>
+        <p:txBody>
+          <a:bodyPr/>
+          <a:p/>
+        </p:txBody>
       </p:sp>
       <p:sp>
         <p:nvSpPr>
@@ -5593,6 +5762,10 @@
           </a:solidFill>
           <a:ln/>
         </p:spPr>
+        <p:txBody>
+          <a:bodyPr/>
+          <a:p/>
+        </p:txBody>
       </p:sp>
       <p:pic>
         <p:nvPicPr>
@@ -5678,6 +5851,10 @@
           </a:solidFill>
           <a:ln/>
         </p:spPr>
+        <p:txBody>
+          <a:bodyPr/>
+          <a:p/>
+        </p:txBody>
       </p:sp>
       <p:sp>
         <p:nvSpPr>
@@ -5698,6 +5875,10 @@
           </a:solidFill>
           <a:ln/>
         </p:spPr>
+        <p:txBody>
+          <a:bodyPr/>
+          <a:p/>
+        </p:txBody>
       </p:sp>
       <p:pic>
         <p:nvPicPr>
@@ -5783,6 +5964,10 @@
           </a:solidFill>
           <a:ln/>
         </p:spPr>
+        <p:txBody>
+          <a:bodyPr/>
+          <a:p/>
+        </p:txBody>
       </p:sp>
       <p:sp>
         <p:nvSpPr>
@@ -5803,6 +5988,10 @@
           </a:solidFill>
           <a:ln/>
         </p:spPr>
+        <p:txBody>
+          <a:bodyPr/>
+          <a:p/>
+        </p:txBody>
       </p:sp>
       <p:pic>
         <p:nvPicPr>
@@ -5893,6 +6082,10 @@
             <a:prstDash val="solid"/>
           </a:ln>
         </p:spPr>
+        <p:txBody>
+          <a:bodyPr/>
+          <a:p/>
+        </p:txBody>
       </p:sp>
       <p:sp>
         <p:nvSpPr>
@@ -5913,6 +6106,10 @@
           </a:solidFill>
           <a:ln/>
         </p:spPr>
+        <p:txBody>
+          <a:bodyPr/>
+          <a:p/>
+        </p:txBody>
       </p:sp>
       <p:sp>
         <p:nvSpPr>
@@ -5933,6 +6130,10 @@
           </a:solidFill>
           <a:ln/>
         </p:spPr>
+        <p:txBody>
+          <a:bodyPr/>
+          <a:p/>
+        </p:txBody>
       </p:sp>
       <p:pic>
         <p:nvPicPr>
@@ -6105,6 +6306,10 @@
           </a:solidFill>
           <a:ln/>
         </p:spPr>
+        <p:txBody>
+          <a:bodyPr/>
+          <a:p/>
+        </p:txBody>
       </p:sp>
       <p:sp>
         <p:nvSpPr>
@@ -6125,6 +6330,10 @@
           </a:solidFill>
           <a:ln/>
         </p:spPr>
+        <p:txBody>
+          <a:bodyPr/>
+          <a:p/>
+        </p:txBody>
       </p:sp>
       <p:pic>
         <p:nvPicPr>
@@ -6210,6 +6419,10 @@
           </a:solidFill>
           <a:ln/>
         </p:spPr>
+        <p:txBody>
+          <a:bodyPr/>
+          <a:p/>
+        </p:txBody>
       </p:sp>
       <p:sp>
         <p:nvSpPr>
@@ -6230,6 +6443,10 @@
           </a:solidFill>
           <a:ln/>
         </p:spPr>
+        <p:txBody>
+          <a:bodyPr/>
+          <a:p/>
+        </p:txBody>
       </p:sp>
       <p:pic>
         <p:nvPicPr>
@@ -6315,6 +6532,10 @@
           </a:solidFill>
           <a:ln/>
         </p:spPr>
+        <p:txBody>
+          <a:bodyPr/>
+          <a:p/>
+        </p:txBody>
       </p:sp>
       <p:sp>
         <p:nvSpPr>
@@ -6335,6 +6556,10 @@
           </a:solidFill>
           <a:ln/>
         </p:spPr>
+        <p:txBody>
+          <a:bodyPr/>
+          <a:p/>
+        </p:txBody>
       </p:sp>
       <p:pic>
         <p:nvPicPr>
@@ -6638,6 +6863,10 @@
             <a:prstDash val="solid"/>
           </a:ln>
         </p:spPr>
+        <p:txBody>
+          <a:bodyPr/>
+          <a:p/>
+        </p:txBody>
       </p:sp>
       <p:pic>
         <p:nvPicPr>
@@ -6793,6 +7022,10 @@
           </a:solidFill>
           <a:ln/>
         </p:spPr>
+        <p:txBody>
+          <a:bodyPr/>
+          <a:p/>
+        </p:txBody>
       </p:sp>
       <p:pic>
         <p:nvPicPr>
@@ -6927,6 +7160,10 @@
             <a:prstDash val="dash"/>
           </a:ln>
         </p:spPr>
+        <p:txBody>
+          <a:bodyPr/>
+          <a:p/>
+        </p:txBody>
       </p:sp>
       <p:pic>
         <p:nvPicPr>
@@ -7012,6 +7249,10 @@
           </a:solidFill>
           <a:ln/>
         </p:spPr>
+        <p:txBody>
+          <a:bodyPr/>
+          <a:p/>
+        </p:txBody>
       </p:sp>
       <p:sp>
         <p:nvSpPr>
@@ -7032,6 +7273,10 @@
           </a:solidFill>
           <a:ln/>
         </p:spPr>
+        <p:txBody>
+          <a:bodyPr/>
+          <a:p/>
+        </p:txBody>
       </p:sp>
       <p:sp>
         <p:nvSpPr>
@@ -7134,6 +7379,10 @@
           </a:solidFill>
           <a:ln/>
         </p:spPr>
+        <p:txBody>
+          <a:bodyPr/>
+          <a:p/>
+        </p:txBody>
       </p:sp>
       <p:pic>
         <p:nvPicPr>
@@ -7268,6 +7517,10 @@
             <a:prstDash val="dash"/>
           </a:ln>
         </p:spPr>
+        <p:txBody>
+          <a:bodyPr/>
+          <a:p/>
+        </p:txBody>
       </p:sp>
       <p:pic>
         <p:nvPicPr>
@@ -7353,6 +7606,10 @@
           </a:solidFill>
           <a:ln/>
         </p:spPr>
+        <p:txBody>
+          <a:bodyPr/>
+          <a:p/>
+        </p:txBody>
       </p:sp>
       <p:sp>
         <p:nvSpPr>
@@ -7373,6 +7630,10 @@
           </a:solidFill>
           <a:ln/>
         </p:spPr>
+        <p:txBody>
+          <a:bodyPr/>
+          <a:p/>
+        </p:txBody>
       </p:sp>
       <p:sp>
         <p:nvSpPr>
@@ -7688,6 +7949,10 @@
           </a:solidFill>
           <a:ln/>
         </p:spPr>
+        <p:txBody>
+          <a:bodyPr/>
+          <a:p/>
+        </p:txBody>
       </p:sp>
       <p:sp>
         <p:nvSpPr>
@@ -7708,6 +7973,10 @@
           </a:solidFill>
           <a:ln/>
         </p:spPr>
+        <p:txBody>
+          <a:bodyPr/>
+          <a:p/>
+        </p:txBody>
       </p:sp>
       <p:pic>
         <p:nvPicPr>
@@ -7837,6 +8106,10 @@
           </a:solidFill>
           <a:ln/>
         </p:spPr>
+        <p:txBody>
+          <a:bodyPr/>
+          <a:p/>
+        </p:txBody>
       </p:sp>
       <p:sp>
         <p:nvSpPr>
@@ -7857,6 +8130,10 @@
           </a:solidFill>
           <a:ln/>
         </p:spPr>
+        <p:txBody>
+          <a:bodyPr/>
+          <a:p/>
+        </p:txBody>
       </p:sp>
       <p:pic>
         <p:nvPicPr>
@@ -7986,6 +8263,10 @@
           </a:solidFill>
           <a:ln/>
         </p:spPr>
+        <p:txBody>
+          <a:bodyPr/>
+          <a:p/>
+        </p:txBody>
       </p:sp>
       <p:sp>
         <p:nvSpPr>
@@ -8006,6 +8287,10 @@
           </a:solidFill>
           <a:ln/>
         </p:spPr>
+        <p:txBody>
+          <a:bodyPr/>
+          <a:p/>
+        </p:txBody>
       </p:sp>
       <p:pic>
         <p:nvPicPr>
@@ -8135,6 +8420,10 @@
           </a:solidFill>
           <a:ln/>
         </p:spPr>
+        <p:txBody>
+          <a:bodyPr/>
+          <a:p/>
+        </p:txBody>
       </p:sp>
       <p:pic>
         <p:nvPicPr>
@@ -8373,6 +8662,10 @@
           </a:solidFill>
           <a:ln/>
         </p:spPr>
+        <p:txBody>
+          <a:bodyPr/>
+          <a:p/>
+        </p:txBody>
       </p:sp>
       <p:pic>
         <p:nvPicPr>
@@ -8616,6 +8909,10 @@
             <a:prstDash val="dash"/>
           </a:ln>
         </p:spPr>
+        <p:txBody>
+          <a:bodyPr/>
+          <a:p/>
+        </p:txBody>
       </p:sp>
       <p:pic>
         <p:nvPicPr>
@@ -8770,6 +9067,458 @@
               <a:t>！</a:t>
             </a:r>
             <a:endParaRPr lang="en-US" sz="1100" dirty="0"/>
+          </a:p>
+        </p:txBody>
+      </p:sp>
+    </p:spTree>
+  </p:cSld>
+  <p:clrMapOvr>
+    <a:masterClrMapping/>
+  </p:clrMapOvr>
+</p:sld>
+</file>
+
+<file path=ppt/slides/slide6.xml><?xml version="1.0" encoding="utf-8"?>
+<p:sld xmlns:a="http://schemas.openxmlformats.org/drawingml/2006/main" xmlns:p="http://schemas.openxmlformats.org/presentationml/2006/main" xmlns:r="http://schemas.openxmlformats.org/officeDocument/2006/relationships">
+  <p:cSld>
+    <p:bg>
+      <p:bgPr>
+        <a:solidFill>
+          <a:srgbClr val="F7FAFC"/>
+        </a:solidFill>
+        <a:effectLst/>
+      </p:bgPr>
+    </p:bg>
+    <p:spTree>
+      <p:nvGrpSpPr>
+        <p:cNvPr id="1" name=""/>
+        <p:cNvGrpSpPr/>
+        <p:nvPr/>
+      </p:nvGrpSpPr>
+      <p:grpSpPr/>
+      <p:sp>
+        <p:nvSpPr>
+          <p:cNvPr id="2" name="Rectangle 1"/>
+          <p:cNvSpPr/>
+          <p:nvPr/>
+        </p:nvSpPr>
+        <p:spPr>
+          <a:xfrm>
+            <a:off x="0" y="0"/>
+            <a:ext cx="12191695" cy="164592"/>
+          </a:xfrm>
+          <a:prstGeom prst="rect">
+            <a:avLst/>
+          </a:prstGeom>
+          <a:solidFill>
+            <a:srgbClr val="1565C0"/>
+          </a:solidFill>
+          <a:ln>
+            <a:noFill/>
+          </a:ln>
+        </p:spPr>
+        <p:style>
+          <a:lnRef idx="1">
+            <a:schemeClr val="accent1"/>
+          </a:lnRef>
+          <a:fillRef idx="3">
+            <a:schemeClr val="accent1"/>
+          </a:fillRef>
+          <a:effectRef idx="2">
+            <a:schemeClr val="accent1"/>
+          </a:effectRef>
+          <a:fontRef idx="minor">
+            <a:schemeClr val="lt1"/>
+          </a:fontRef>
+        </p:style>
+        <p:txBody>
+          <a:bodyPr rtlCol="0" anchor="ctr"/>
+          <a:lstStyle/>
+          <a:p>
+            <a:pPr algn="ctr"/>
+          </a:p>
+        </p:txBody>
+      </p:sp>
+      <p:sp>
+        <p:nvSpPr>
+          <p:cNvPr id="3" name="TextBox 2"/>
+          <p:cNvSpPr txBox="1"/>
+          <p:nvPr/>
+        </p:nvSpPr>
+        <p:spPr>
+          <a:xfrm>
+            <a:off x="502920" y="320040"/>
+            <a:ext cx="6583680" cy="274320"/>
+          </a:xfrm>
+          <a:prstGeom prst="rect">
+            <a:avLst/>
+          </a:prstGeom>
+          <a:noFill/>
+        </p:spPr>
+        <p:txBody>
+          <a:bodyPr wrap="none">
+            <a:spAutoFit/>
+          </a:bodyPr>
+          <a:lstStyle/>
+          <a:p>
+            <a:r>
+              <a:rPr sz="1200" b="1">
+                <a:solidFill>
+                  <a:srgbClr val="1A3A6B"/>
+                </a:solidFill>
+                <a:latin typeface="Microsoft YaHei"/>
+              </a:rPr>
+              <a:t>中驰智能PPT Demo</a:t>
+            </a:r>
+          </a:p>
+        </p:txBody>
+      </p:sp>
+      <p:sp>
+        <p:nvSpPr>
+          <p:cNvPr id="4" name="TextBox 3"/>
+          <p:cNvSpPr txBox="1"/>
+          <p:nvPr/>
+        </p:nvSpPr>
+        <p:spPr>
+          <a:xfrm>
+            <a:off x="9509760" y="320040"/>
+            <a:ext cx="2103120" cy="274320"/>
+          </a:xfrm>
+          <a:prstGeom prst="rect">
+            <a:avLst/>
+          </a:prstGeom>
+          <a:noFill/>
+        </p:spPr>
+        <p:txBody>
+          <a:bodyPr wrap="none">
+            <a:spAutoFit/>
+          </a:bodyPr>
+          <a:lstStyle/>
+          <a:p>
+            <a:r>
+              <a:rPr sz="1100" b="1">
+                <a:solidFill>
+                  <a:srgbClr val="CA8A04"/>
+                </a:solidFill>
+                <a:latin typeface="Microsoft YaHei"/>
+              </a:rPr>
+              <a:t>M1/M2 | 项目生成信息</a:t>
+            </a:r>
+          </a:p>
+        </p:txBody>
+      </p:sp>
+      <p:sp>
+        <p:nvSpPr>
+          <p:cNvPr id="5" name="TextBox 4"/>
+          <p:cNvSpPr txBox="1"/>
+          <p:nvPr/>
+        </p:nvSpPr>
+        <p:spPr>
+          <a:xfrm>
+            <a:off x="640080" y="640080"/>
+            <a:ext cx="9144000" cy="502920"/>
+          </a:xfrm>
+          <a:prstGeom prst="rect">
+            <a:avLst/>
+          </a:prstGeom>
+          <a:noFill/>
+        </p:spPr>
+        <p:txBody>
+          <a:bodyPr wrap="none">
+            <a:spAutoFit/>
+          </a:bodyPr>
+          <a:lstStyle/>
+          <a:p>
+            <a:r>
+              <a:rPr sz="2600" b="1">
+                <a:solidFill>
+                  <a:srgbClr val="1A3A6B"/>
+                </a:solidFill>
+                <a:latin typeface="Microsoft YaHei"/>
+              </a:rPr>
+              <a:t>项目生成信息</a:t>
+            </a:r>
+          </a:p>
+        </p:txBody>
+      </p:sp>
+      <p:sp>
+        <p:nvSpPr>
+          <p:cNvPr id="6" name="Rectangle 5"/>
+          <p:cNvSpPr/>
+          <p:nvPr/>
+        </p:nvSpPr>
+        <p:spPr>
+          <a:xfrm>
+            <a:off x="640080" y="1234440"/>
+            <a:ext cx="1828800" cy="54864"/>
+          </a:xfrm>
+          <a:prstGeom prst="rect">
+            <a:avLst/>
+          </a:prstGeom>
+          <a:solidFill>
+            <a:srgbClr val="1565C0"/>
+          </a:solidFill>
+          <a:ln>
+            <a:noFill/>
+          </a:ln>
+        </p:spPr>
+        <p:style>
+          <a:lnRef idx="1">
+            <a:schemeClr val="accent1"/>
+          </a:lnRef>
+          <a:fillRef idx="3">
+            <a:schemeClr val="accent1"/>
+          </a:fillRef>
+          <a:effectRef idx="2">
+            <a:schemeClr val="accent1"/>
+          </a:effectRef>
+          <a:fontRef idx="minor">
+            <a:schemeClr val="lt1"/>
+          </a:fontRef>
+        </p:style>
+        <p:txBody>
+          <a:bodyPr rtlCol="0" anchor="ctr"/>
+          <a:lstStyle/>
+          <a:p>
+            <a:pPr algn="ctr"/>
+          </a:p>
+        </p:txBody>
+      </p:sp>
+      <p:sp>
+        <p:nvSpPr>
+          <p:cNvPr id="7" name="TextBox 6"/>
+          <p:cNvSpPr txBox="1"/>
+          <p:nvPr/>
+        </p:nvSpPr>
+        <p:spPr>
+          <a:xfrm>
+            <a:off x="822960" y="1508760"/>
+            <a:ext cx="9601200" cy="411480"/>
+          </a:xfrm>
+          <a:prstGeom prst="rect">
+            <a:avLst/>
+          </a:prstGeom>
+          <a:noFill/>
+        </p:spPr>
+        <p:txBody>
+          <a:bodyPr wrap="none">
+            <a:spAutoFit/>
+          </a:bodyPr>
+          <a:lstStyle/>
+          <a:p>
+            <a:r>
+              <a:rPr sz="1600" b="0">
+                <a:solidFill>
+                  <a:srgbClr val="1F2937"/>
+                </a:solidFill>
+                <a:latin typeface="Microsoft YaHei"/>
+              </a:rPr>
+              <a:t>项目名称：{{project_name}}</a:t>
+            </a:r>
+          </a:p>
+        </p:txBody>
+      </p:sp>
+      <p:sp>
+        <p:nvSpPr>
+          <p:cNvPr id="8" name="TextBox 7"/>
+          <p:cNvSpPr txBox="1"/>
+          <p:nvPr/>
+        </p:nvSpPr>
+        <p:spPr>
+          <a:xfrm>
+            <a:off x="822960" y="2011680"/>
+            <a:ext cx="9601200" cy="411480"/>
+          </a:xfrm>
+          <a:prstGeom prst="rect">
+            <a:avLst/>
+          </a:prstGeom>
+          <a:noFill/>
+        </p:spPr>
+        <p:txBody>
+          <a:bodyPr wrap="none">
+            <a:spAutoFit/>
+          </a:bodyPr>
+          <a:lstStyle/>
+          <a:p>
+            <a:r>
+              <a:rPr sz="1600" b="0">
+                <a:solidFill>
+                  <a:srgbClr val="1F2937"/>
+                </a:solidFill>
+                <a:latin typeface="Microsoft YaHei"/>
+              </a:rPr>
+              <a:t>项目所在地：{{project_location}}</a:t>
+            </a:r>
+          </a:p>
+        </p:txBody>
+      </p:sp>
+      <p:sp>
+        <p:nvSpPr>
+          <p:cNvPr id="9" name="TextBox 8"/>
+          <p:cNvSpPr txBox="1"/>
+          <p:nvPr/>
+        </p:nvSpPr>
+        <p:spPr>
+          <a:xfrm>
+            <a:off x="822960" y="2514600"/>
+            <a:ext cx="9601200" cy="411480"/>
+          </a:xfrm>
+          <a:prstGeom prst="rect">
+            <a:avLst/>
+          </a:prstGeom>
+          <a:noFill/>
+        </p:spPr>
+        <p:txBody>
+          <a:bodyPr wrap="none">
+            <a:spAutoFit/>
+          </a:bodyPr>
+          <a:lstStyle/>
+          <a:p>
+            <a:r>
+              <a:rPr sz="1600" b="0">
+                <a:solidFill>
+                  <a:srgbClr val="1F2937"/>
+                </a:solidFill>
+                <a:latin typeface="Microsoft YaHei"/>
+              </a:rPr>
+              <a:t>建设/业主单位：{{owner_unit}}</a:t>
+            </a:r>
+          </a:p>
+        </p:txBody>
+      </p:sp>
+      <p:sp>
+        <p:nvSpPr>
+          <p:cNvPr id="10" name="TextBox 9"/>
+          <p:cNvSpPr txBox="1"/>
+          <p:nvPr/>
+        </p:nvSpPr>
+        <p:spPr>
+          <a:xfrm>
+            <a:off x="822960" y="3017520"/>
+            <a:ext cx="9601200" cy="411480"/>
+          </a:xfrm>
+          <a:prstGeom prst="rect">
+            <a:avLst/>
+          </a:prstGeom>
+          <a:noFill/>
+        </p:spPr>
+        <p:txBody>
+          <a:bodyPr wrap="none">
+            <a:spAutoFit/>
+          </a:bodyPr>
+          <a:lstStyle/>
+          <a:p>
+            <a:r>
+              <a:rPr sz="1600" b="0">
+                <a:solidFill>
+                  <a:srgbClr val="1F2937"/>
+                </a:solidFill>
+                <a:latin typeface="Microsoft YaHei"/>
+              </a:rPr>
+              <a:t>产品线：{{product_line}}</a:t>
+            </a:r>
+          </a:p>
+        </p:txBody>
+      </p:sp>
+      <p:sp>
+        <p:nvSpPr>
+          <p:cNvPr id="11" name="TextBox 10"/>
+          <p:cNvSpPr txBox="1"/>
+          <p:nvPr/>
+        </p:nvSpPr>
+        <p:spPr>
+          <a:xfrm>
+            <a:off x="822960" y="3520440"/>
+            <a:ext cx="9601200" cy="411480"/>
+          </a:xfrm>
+          <a:prstGeom prst="rect">
+            <a:avLst/>
+          </a:prstGeom>
+          <a:noFill/>
+        </p:spPr>
+        <p:txBody>
+          <a:bodyPr wrap="none">
+            <a:spAutoFit/>
+          </a:bodyPr>
+          <a:lstStyle/>
+          <a:p>
+            <a:r>
+              <a:rPr sz="1600" b="0">
+                <a:solidFill>
+                  <a:srgbClr val="1F2937"/>
+                </a:solidFill>
+                <a:latin typeface="Microsoft YaHei"/>
+              </a:rPr>
+              <a:t>线路名称：{{line_name}}</a:t>
+            </a:r>
+          </a:p>
+        </p:txBody>
+      </p:sp>
+      <p:sp>
+        <p:nvSpPr>
+          <p:cNvPr id="12" name="TextBox 11"/>
+          <p:cNvSpPr txBox="1"/>
+          <p:nvPr/>
+        </p:nvSpPr>
+        <p:spPr>
+          <a:xfrm>
+            <a:off x="822960" y="4023360"/>
+            <a:ext cx="9601200" cy="411480"/>
+          </a:xfrm>
+          <a:prstGeom prst="rect">
+            <a:avLst/>
+          </a:prstGeom>
+          <a:noFill/>
+        </p:spPr>
+        <p:txBody>
+          <a:bodyPr wrap="none">
+            <a:spAutoFit/>
+          </a:bodyPr>
+          <a:lstStyle/>
+          <a:p>
+            <a:r>
+              <a:rPr sz="1600" b="0">
+                <a:solidFill>
+                  <a:srgbClr val="1F2937"/>
+                </a:solidFill>
+                <a:latin typeface="Microsoft YaHei"/>
+              </a:rPr>
+              <a:t>现场痛点：{{site_pain_points}}</a:t>
+            </a:r>
+          </a:p>
+        </p:txBody>
+      </p:sp>
+      <p:sp>
+        <p:nvSpPr>
+          <p:cNvPr id="13" name="TextBox 12"/>
+          <p:cNvSpPr txBox="1"/>
+          <p:nvPr/>
+        </p:nvSpPr>
+        <p:spPr>
+          <a:xfrm>
+            <a:off x="822960" y="4526280"/>
+            <a:ext cx="9601200" cy="411480"/>
+          </a:xfrm>
+          <a:prstGeom prst="rect">
+            <a:avLst/>
+          </a:prstGeom>
+          <a:noFill/>
+        </p:spPr>
+        <p:txBody>
+          <a:bodyPr wrap="none">
+            <a:spAutoFit/>
+          </a:bodyPr>
+          <a:lstStyle/>
+          <a:p>
+            <a:r>
+              <a:rPr sz="1600" b="0">
+                <a:solidFill>
+                  <a:srgbClr val="1F2937"/>
+                </a:solidFill>
+                <a:latin typeface="Microsoft YaHei"/>
+              </a:rPr>
+              <a:t>施工场景：{{construction_scenario}}</a:t>
+            </a:r>
           </a:p>
         </p:txBody>
       </p:sp>

--- a/ppt_engine/templates/solution_fixed_modules/轨道交通地铁全封闭声屏障（M1_&_M2）.pptx
+++ b/ppt_engine/templates/solution_fixed_modules/轨道交通地铁全封闭声屏障（M1_&_M2）.pptx
@@ -5,24 +5,22 @@
     <p:sldMasterId id="2147483648" r:id="rId1"/>
   </p:sldMasterIdLst>
   <p:notesMasterIdLst>
-    <p:notesMasterId r:id="rId9"/>
+    <p:notesMasterId r:id="rId7"/>
   </p:notesMasterIdLst>
   <p:handoutMasterIdLst>
-    <p:handoutMasterId r:id="rId10"/>
+    <p:handoutMasterId r:id="rId8"/>
   </p:handoutMasterIdLst>
   <p:sldIdLst>
-    <p:sldId id="2884" r:id="rId2"/>
-    <p:sldId id="256" r:id="rId3"/>
-    <p:sldId id="257" r:id="rId4"/>
-    <p:sldId id="258" r:id="rId5"/>
-    <p:sldId id="259" r:id="rId6"/>
-    <p:sldId id="260" r:id="rId7"/>
-    <p:sldId id="261" r:id="rId8"/>
+    <p:sldId id="256" r:id="rId2"/>
+    <p:sldId id="257" r:id="rId3"/>
+    <p:sldId id="258" r:id="rId4"/>
+    <p:sldId id="259" r:id="rId5"/>
+    <p:sldId id="260" r:id="rId6"/>
   </p:sldIdLst>
   <p:sldSz cx="11522075" cy="6480175"/>
   <p:notesSz cx="6797675" cy="9926638"/>
   <p:custDataLst>
-    <p:tags r:id="rId11"/>
+    <p:tags r:id="rId9"/>
   </p:custDataLst>
   <p:defaultTextStyle>
     <a:defPPr>
@@ -815,7 +813,7 @@
       </p:grpSpPr>
       <p:sp>
         <p:nvSpPr>
-          <p:cNvPr id="2" name="幻灯片图像占位符 1"/>
+          <p:cNvPr id="2" name="Slide Image Placeholder 1"/>
           <p:cNvSpPr>
             <a:spLocks noGrp="1" noRot="1" noChangeAspect="1"/>
           </p:cNvSpPr>
@@ -827,7 +825,7 @@
       </p:sp>
       <p:sp>
         <p:nvSpPr>
-          <p:cNvPr id="3" name="备注占位符 2"/>
+          <p:cNvPr id="3" name="Notes Placeholder 2"/>
           <p:cNvSpPr>
             <a:spLocks noGrp="1"/>
           </p:cNvSpPr>
@@ -840,30 +838,39 @@
           <a:bodyPr/>
           <a:lstStyle/>
           <a:p>
-            <a:pPr marL="0" marR="0" indent="0" defTabSz="914400" eaLnBrk="1" fontAlgn="auto" latinLnBrk="0" hangingPunct="1">
-              <a:lnSpc>
-                <a:spcPct val="100000"/>
-              </a:lnSpc>
-              <a:spcBef>
-                <a:spcPts val="0"/>
-              </a:spcBef>
-              <a:spcAft>
-                <a:spcPts val="0"/>
-              </a:spcAft>
-              <a:buClrTx/>
-              <a:buSzTx/>
-              <a:buFontTx/>
-              <a:buNone/>
-              <a:defRPr/>
-            </a:pPr>
-            <a:r>
-              <a:rPr lang="zh-CN" altLang="en-US" dirty="0"/>
-              <a:t>内页</a:t>
-            </a:r>
+            <a:endParaRPr lang="en-US" dirty="0"/>
+          </a:p>
+        </p:txBody>
+      </p:sp>
+      <p:sp>
+        <p:nvSpPr>
+          <p:cNvPr id="4" name="Slide Number Placeholder 3"/>
+          <p:cNvSpPr>
+            <a:spLocks noGrp="1"/>
+          </p:cNvSpPr>
+          <p:nvPr>
+            <p:ph type="sldNum" sz="quarter" idx="10"/>
+          </p:nvPr>
+        </p:nvSpPr>
+        <p:spPr/>
+        <p:txBody>
+          <a:bodyPr/>
+          <a:lstStyle/>
+          <a:p>
+            <a:fld id="{F7021451-1387-4CA6-816F-3879F97B5CBC}" type="slidenum">
+              <a:rPr lang="en-US"/>
+              <a:t>1</a:t>
+            </a:fld>
+            <a:endParaRPr lang="en-US"/>
           </a:p>
         </p:txBody>
       </p:sp>
     </p:spTree>
+    <p:extLst>
+      <p:ext uri="{BB962C8B-B14F-4D97-AF65-F5344CB8AC3E}">
+        <p14:creationId xmlns:p14="http://schemas.microsoft.com/office/powerpoint/2010/main" val="1024086991"/>
+      </p:ext>
+    </p:extLst>
   </p:cSld>
   <p:clrMapOvr>
     <a:masterClrMapping/>
@@ -1207,9 +1214,9 @@
 </p:notes>
 </file>
 
-<file path=ppt/notesSlides/notesSlide6.xml><?xml version="1.0" encoding="utf-8"?>
-<p:notes xmlns:a="http://schemas.openxmlformats.org/drawingml/2006/main" xmlns:r="http://schemas.openxmlformats.org/officeDocument/2006/relationships" xmlns:p="http://schemas.openxmlformats.org/presentationml/2006/main">
-  <p:cSld>
+<file path=ppt/slideLayouts/slideLayout1.xml><?xml version="1.0" encoding="utf-8"?>
+<p:sldLayout xmlns:a="http://schemas.openxmlformats.org/drawingml/2006/main" xmlns:r="http://schemas.openxmlformats.org/officeDocument/2006/relationships" xmlns:p="http://schemas.openxmlformats.org/presentationml/2006/main" type="blank" preserve="1">
+  <p:cSld name="1_空白">
     <p:spTree>
       <p:nvGrpSpPr>
         <p:cNvPr id="1" name=""/>
@@ -1226,38 +1233,7 @@
       </p:grpSpPr>
       <p:sp>
         <p:nvSpPr>
-          <p:cNvPr id="2" name="Slide Image Placeholder 1"/>
-          <p:cNvSpPr>
-            <a:spLocks noGrp="1" noRot="1" noChangeAspect="1"/>
-          </p:cNvSpPr>
-          <p:nvPr>
-            <p:ph type="sldImg"/>
-          </p:nvPr>
-        </p:nvSpPr>
-        <p:spPr/>
-      </p:sp>
-      <p:sp>
-        <p:nvSpPr>
-          <p:cNvPr id="3" name="Notes Placeholder 2"/>
-          <p:cNvSpPr>
-            <a:spLocks noGrp="1"/>
-          </p:cNvSpPr>
-          <p:nvPr>
-            <p:ph type="body" idx="1"/>
-          </p:nvPr>
-        </p:nvSpPr>
-        <p:spPr/>
-        <p:txBody>
-          <a:bodyPr/>
-          <a:lstStyle/>
-          <a:p>
-            <a:endParaRPr lang="en-US" dirty="0"/>
-          </a:p>
-        </p:txBody>
-      </p:sp>
-      <p:sp>
-        <p:nvSpPr>
-          <p:cNvPr id="4" name="Slide Number Placeholder 3"/>
+          <p:cNvPr id="2" name="灯片编号占位符 1"/>
           <p:cNvSpPr>
             <a:spLocks noGrp="1"/>
           </p:cNvSpPr>
@@ -1269,292 +1245,6 @@
         <p:txBody>
           <a:bodyPr/>
           <a:lstStyle/>
-          <a:p>
-            <a:fld id="{F7021451-1387-4CA6-816F-3879F97B5CBC}" type="slidenum">
-              <a:rPr lang="en-US"/>
-              <a:t>6</a:t>
-            </a:fld>
-            <a:endParaRPr lang="en-US"/>
-          </a:p>
-        </p:txBody>
-      </p:sp>
-    </p:spTree>
-    <p:extLst>
-      <p:ext uri="{BB962C8B-B14F-4D97-AF65-F5344CB8AC3E}">
-        <p14:creationId xmlns:p14="http://schemas.microsoft.com/office/powerpoint/2010/main" val="1024086991"/>
-      </p:ext>
-    </p:extLst>
-  </p:cSld>
-  <p:clrMapOvr>
-    <a:masterClrMapping/>
-  </p:clrMapOvr>
-</p:notes>
-</file>
-
-<file path=ppt/slideLayouts/slideLayout1.xml><?xml version="1.0" encoding="utf-8"?>
-<p:sldLayout xmlns:a="http://schemas.openxmlformats.org/drawingml/2006/main" xmlns:r="http://schemas.openxmlformats.org/officeDocument/2006/relationships" xmlns:p="http://schemas.openxmlformats.org/presentationml/2006/main" type="obj">
-  <p:cSld name="标题和内容">
-    <p:bg>
-      <p:bgPr>
-        <a:solidFill>
-          <a:srgbClr val="FFFFFF"/>
-        </a:solidFill>
-        <a:effectLst/>
-      </p:bgPr>
-    </p:bg>
-    <p:spTree>
-      <p:nvGrpSpPr>
-        <p:cNvPr id="1" name=""/>
-        <p:cNvGrpSpPr/>
-        <p:nvPr/>
-      </p:nvGrpSpPr>
-      <p:grpSpPr>
-        <a:xfrm>
-          <a:off x="0" y="0"/>
-          <a:ext cx="0" cy="0"/>
-          <a:chOff x="0" y="0"/>
-          <a:chExt cx="0" cy="0"/>
-        </a:xfrm>
-      </p:grpSpPr>
-      <p:sp>
-        <p:nvSpPr>
-          <p:cNvPr id="2" name="Title 1"/>
-          <p:cNvSpPr>
-            <a:spLocks noGrp="1"/>
-          </p:cNvSpPr>
-          <p:nvPr>
-            <p:ph type="title"/>
-          </p:nvPr>
-        </p:nvSpPr>
-        <p:spPr/>
-        <p:txBody>
-          <a:bodyPr/>
-          <a:lstStyle/>
-          <a:p>
-            <a:r>
-              <a:rPr lang="zh-CN" altLang="en-US" noProof="1"/>
-              <a:t>单击此处编辑母版标题样式</a:t>
-            </a:r>
-            <a:endParaRPr lang="en-US" noProof="1"/>
-          </a:p>
-        </p:txBody>
-      </p:sp>
-      <p:sp>
-        <p:nvSpPr>
-          <p:cNvPr id="3" name="Content Placeholder 2"/>
-          <p:cNvSpPr>
-            <a:spLocks noGrp="1"/>
-          </p:cNvSpPr>
-          <p:nvPr>
-            <p:ph idx="1"/>
-          </p:nvPr>
-        </p:nvSpPr>
-        <p:spPr/>
-        <p:txBody>
-          <a:bodyPr/>
-          <a:lstStyle/>
-          <a:p>
-            <a:pPr lvl="0"/>
-            <a:r>
-              <a:rPr lang="zh-CN" altLang="en-US" noProof="1"/>
-              <a:t>单击此处编辑母版文本样式</a:t>
-            </a:r>
-          </a:p>
-          <a:p>
-            <a:pPr lvl="1"/>
-            <a:r>
-              <a:rPr lang="zh-CN" altLang="en-US" noProof="1"/>
-              <a:t>二级</a:t>
-            </a:r>
-          </a:p>
-          <a:p>
-            <a:pPr lvl="2"/>
-            <a:r>
-              <a:rPr lang="zh-CN" altLang="en-US" noProof="1"/>
-              <a:t>三级</a:t>
-            </a:r>
-          </a:p>
-          <a:p>
-            <a:pPr lvl="3"/>
-            <a:r>
-              <a:rPr lang="zh-CN" altLang="en-US" noProof="1"/>
-              <a:t>四级</a:t>
-            </a:r>
-          </a:p>
-          <a:p>
-            <a:pPr lvl="4"/>
-            <a:r>
-              <a:rPr lang="zh-CN" altLang="en-US" noProof="1"/>
-              <a:t>五级</a:t>
-            </a:r>
-            <a:endParaRPr lang="en-US" noProof="1"/>
-          </a:p>
-        </p:txBody>
-      </p:sp>
-      <p:sp>
-        <p:nvSpPr>
-          <p:cNvPr id="6" name="Date Placeholder 3"/>
-          <p:cNvSpPr>
-            <a:spLocks noGrp="1"/>
-          </p:cNvSpPr>
-          <p:nvPr>
-            <p:ph type="dt" sz="half" idx="2"/>
-          </p:nvPr>
-        </p:nvSpPr>
-        <p:spPr>
-          <a:xfrm>
-            <a:off x="792163" y="6005513"/>
-            <a:ext cx="2592388" cy="346075"/>
-          </a:xfrm>
-          <a:prstGeom prst="rect">
-            <a:avLst/>
-          </a:prstGeom>
-        </p:spPr>
-        <p:txBody>
-          <a:bodyPr lIns="91440" tIns="45720" rIns="91440" bIns="45720"/>
-          <a:lstStyle>
-            <a:lvl1pPr eaLnBrk="1" fontAlgn="auto" hangingPunct="1">
-              <a:defRPr kumimoji="1" noProof="1"/>
-            </a:lvl1pPr>
-          </a:lstStyle>
-          <a:p>
-            <a:pPr marL="0" marR="0" lvl="0" indent="0" algn="l" defTabSz="431800" rtl="0" eaLnBrk="1" fontAlgn="auto" latinLnBrk="0" hangingPunct="1">
-              <a:lnSpc>
-                <a:spcPct val="100000"/>
-              </a:lnSpc>
-              <a:spcBef>
-                <a:spcPct val="0"/>
-              </a:spcBef>
-              <a:spcAft>
-                <a:spcPct val="0"/>
-              </a:spcAft>
-              <a:buClrTx/>
-              <a:buSzTx/>
-              <a:buFontTx/>
-              <a:buNone/>
-              <a:defRPr/>
-            </a:pPr>
-            <a:endParaRPr kumimoji="1" lang="zh-CN" altLang="en-US" sz="1700" b="0" i="0" u="none" strike="noStrike" kern="1200" cap="none" spc="0" normalizeH="0" baseline="0" noProof="1">
-              <a:ln>
-                <a:noFill/>
-              </a:ln>
-              <a:solidFill>
-                <a:srgbClr val="000000"/>
-              </a:solidFill>
-              <a:effectLst/>
-              <a:uLnTx/>
-              <a:uFillTx/>
-              <a:latin typeface="Palatino Linotype" panose="02040502050505030304" pitchFamily="18" charset="0"/>
-              <a:ea typeface="宋体" panose="02010600030101010101" pitchFamily="2" charset="-122"/>
-              <a:cs typeface="+mn-cs"/>
-              <a:sym typeface="等线" panose="02010600030101010101" pitchFamily="2" charset="-122"/>
-            </a:endParaRPr>
-          </a:p>
-        </p:txBody>
-      </p:sp>
-      <p:sp>
-        <p:nvSpPr>
-          <p:cNvPr id="7" name="Footer Placeholder 4"/>
-          <p:cNvSpPr>
-            <a:spLocks noGrp="1"/>
-          </p:cNvSpPr>
-          <p:nvPr>
-            <p:ph type="ftr" sz="quarter" idx="3"/>
-          </p:nvPr>
-        </p:nvSpPr>
-        <p:spPr>
-          <a:xfrm>
-            <a:off x="3816350" y="6005513"/>
-            <a:ext cx="3889375" cy="346075"/>
-          </a:xfrm>
-          <a:prstGeom prst="rect">
-            <a:avLst/>
-          </a:prstGeom>
-        </p:spPr>
-        <p:txBody>
-          <a:bodyPr lIns="91440" tIns="45720" rIns="91440" bIns="45720"/>
-          <a:lstStyle>
-            <a:lvl1pPr eaLnBrk="1" fontAlgn="auto" hangingPunct="1">
-              <a:defRPr kumimoji="1" noProof="1"/>
-            </a:lvl1pPr>
-          </a:lstStyle>
-          <a:p>
-            <a:pPr marL="0" marR="0" lvl="0" indent="0" algn="l" defTabSz="431800" rtl="0" eaLnBrk="1" fontAlgn="auto" latinLnBrk="0" hangingPunct="1">
-              <a:lnSpc>
-                <a:spcPct val="100000"/>
-              </a:lnSpc>
-              <a:spcBef>
-                <a:spcPct val="0"/>
-              </a:spcBef>
-              <a:spcAft>
-                <a:spcPct val="0"/>
-              </a:spcAft>
-              <a:buClrTx/>
-              <a:buSzTx/>
-              <a:buFontTx/>
-              <a:buNone/>
-              <a:defRPr/>
-            </a:pPr>
-            <a:endParaRPr kumimoji="1" lang="zh-CN" altLang="en-US" sz="1700" b="0" i="0" u="none" strike="noStrike" kern="1200" cap="none" spc="0" normalizeH="0" baseline="0" noProof="1">
-              <a:ln>
-                <a:noFill/>
-              </a:ln>
-              <a:solidFill>
-                <a:srgbClr val="000000"/>
-              </a:solidFill>
-              <a:effectLst/>
-              <a:uLnTx/>
-              <a:uFillTx/>
-              <a:latin typeface="Palatino Linotype" panose="02040502050505030304" pitchFamily="18" charset="0"/>
-              <a:ea typeface="宋体" panose="02010600030101010101" pitchFamily="2" charset="-122"/>
-              <a:cs typeface="+mn-cs"/>
-              <a:sym typeface="等线" panose="02010600030101010101" pitchFamily="2" charset="-122"/>
-            </a:endParaRPr>
-          </a:p>
-        </p:txBody>
-      </p:sp>
-      <p:sp>
-        <p:nvSpPr>
-          <p:cNvPr id="8" name="幻灯片编号"/>
-          <p:cNvSpPr txBox="1">
-            <a:spLocks noGrp="1"/>
-          </p:cNvSpPr>
-          <p:nvPr>
-            <p:ph type="sldNum" sz="quarter" idx="4"/>
-          </p:nvPr>
-        </p:nvSpPr>
-        <p:spPr>
-          <a:xfrm>
-            <a:off x="10845800" y="6049963"/>
-            <a:ext cx="254000" cy="257175"/>
-          </a:xfrm>
-          <a:prstGeom prst="rect">
-            <a:avLst/>
-          </a:prstGeom>
-          <a:ln w="12700">
-            <a:miter lim="400000"/>
-          </a:ln>
-        </p:spPr>
-        <p:txBody>
-          <a:bodyPr wrap="none" lIns="43204" tIns="43204" rIns="43204" bIns="43204" anchor="ctr">
-            <a:spAutoFit/>
-          </a:bodyPr>
-          <a:lstStyle>
-            <a:lvl1pPr algn="r">
-              <a:defRPr sz="1100" b="0" i="0" smtClean="0">
-                <a:solidFill>
-                  <a:schemeClr val="tx1">
-                    <a:lumMod val="75000"/>
-                    <a:lumOff val="25000"/>
-                  </a:schemeClr>
-                </a:solidFill>
-                <a:latin typeface="黑体" panose="02010609060101010101" pitchFamily="49" charset="-122"/>
-                <a:ea typeface="黑体" panose="02010609060101010101" pitchFamily="49" charset="-122"/>
-                <a:cs typeface="黑体" panose="02010609060101010101" pitchFamily="49" charset="-122"/>
-                <a:sym typeface="Calibri" panose="020F0502020204030204"/>
-              </a:defRPr>
-            </a:lvl1pPr>
-          </a:lstStyle>
           <a:p>
             <a:pPr marL="0" marR="0" lvl="0" indent="0" algn="r" defTabSz="431800" rtl="0" eaLnBrk="1" fontAlgn="auto" latinLnBrk="0" hangingPunct="1">
               <a:lnSpc>
@@ -1572,7 +1262,7 @@
               <a:buNone/>
               <a:defRPr/>
             </a:pPr>
-            <a:fld id="{DCCCABE6-6732-4ACA-8D43-943F4C4C37C1}" type="slidenum">
+            <a:fld id="{51D65B7D-B529-4D68-BC16-03759A9C2313}" type="slidenum">
               <a:rPr kumimoji="0" lang="en-US" altLang="zh-CN" sz="1100" b="0" i="0" u="none" strike="noStrike" kern="1200" cap="none" spc="0" normalizeH="0" baseline="0" noProof="1">
                 <a:ln>
                   <a:noFill/>
@@ -1728,32 +1418,6 @@
 </file>
 
 <file path=ppt/slideLayouts/slideLayout14.xml><?xml version="1.0" encoding="utf-8"?>
-<p:sldLayout xmlns:a="http://schemas.openxmlformats.org/drawingml/2006/main" xmlns:r="http://schemas.openxmlformats.org/officeDocument/2006/relationships" xmlns:p="http://schemas.openxmlformats.org/presentationml/2006/main">
-  <p:cSld>
-    <p:spTree>
-      <p:nvGrpSpPr>
-        <p:cNvPr id="1" name=""/>
-        <p:cNvGrpSpPr/>
-        <p:nvPr/>
-      </p:nvGrpSpPr>
-      <p:grpSpPr>
-        <a:xfrm>
-          <a:off x="0" y="0"/>
-          <a:ext cx="0" cy="0"/>
-          <a:chOff x="0" y="0"/>
-          <a:chExt cx="0" cy="0"/>
-        </a:xfrm>
-      </p:grpSpPr>
-    </p:spTree>
-  </p:cSld>
-  <p:clrMapOvr>
-    <a:masterClrMapping/>
-  </p:clrMapOvr>
-  <p:transition spd="med"/>
-</p:sldLayout>
-</file>
-
-<file path=ppt/slideLayouts/slideLayout15.xml><?xml version="1.0" encoding="utf-8"?>
 <p:sldLayout xmlns:a="http://schemas.openxmlformats.org/drawingml/2006/main" xmlns:r="http://schemas.openxmlformats.org/officeDocument/2006/relationships" xmlns:p="http://schemas.openxmlformats.org/presentationml/2006/main" preserve="1" userDrawn="1">
   <p:cSld name="仅标题">
     <p:spTree>
@@ -1918,7 +1582,7 @@
 </p:sldLayout>
 </file>
 
-<file path=ppt/slideLayouts/slideLayout16.xml><?xml version="1.0" encoding="utf-8"?>
+<file path=ppt/slideLayouts/slideLayout15.xml><?xml version="1.0" encoding="utf-8"?>
 <p:sldLayout xmlns:a="http://schemas.openxmlformats.org/drawingml/2006/main" xmlns:r="http://schemas.openxmlformats.org/officeDocument/2006/relationships" xmlns:p="http://schemas.openxmlformats.org/presentationml/2006/main" preserve="1" userDrawn="1">
   <p:cSld name="Title">
     <p:spTree>
@@ -1944,7 +1608,7 @@
 </p:sldLayout>
 </file>
 
-<file path=ppt/slideLayouts/slideLayout17.xml><?xml version="1.0" encoding="utf-8"?>
+<file path=ppt/slideLayouts/slideLayout16.xml><?xml version="1.0" encoding="utf-8"?>
 <p:sldLayout xmlns:a="http://schemas.openxmlformats.org/drawingml/2006/main" xmlns:r="http://schemas.openxmlformats.org/officeDocument/2006/relationships" xmlns:p="http://schemas.openxmlformats.org/presentationml/2006/main" preserve="1">
   <p:cSld name="DEFAULT">
     <p:bg>
@@ -1976,105 +1640,6 @@
 </file>
 
 <file path=ppt/slideLayouts/slideLayout2.xml><?xml version="1.0" encoding="utf-8"?>
-<p:sldLayout xmlns:a="http://schemas.openxmlformats.org/drawingml/2006/main" xmlns:r="http://schemas.openxmlformats.org/officeDocument/2006/relationships" xmlns:p="http://schemas.openxmlformats.org/presentationml/2006/main" type="blank" preserve="1">
-  <p:cSld name="1_空白">
-    <p:spTree>
-      <p:nvGrpSpPr>
-        <p:cNvPr id="1" name=""/>
-        <p:cNvGrpSpPr/>
-        <p:nvPr/>
-      </p:nvGrpSpPr>
-      <p:grpSpPr>
-        <a:xfrm>
-          <a:off x="0" y="0"/>
-          <a:ext cx="0" cy="0"/>
-          <a:chOff x="0" y="0"/>
-          <a:chExt cx="0" cy="0"/>
-        </a:xfrm>
-      </p:grpSpPr>
-      <p:sp>
-        <p:nvSpPr>
-          <p:cNvPr id="2" name="灯片编号占位符 1"/>
-          <p:cNvSpPr>
-            <a:spLocks noGrp="1"/>
-          </p:cNvSpPr>
-          <p:nvPr>
-            <p:ph type="sldNum" sz="quarter" idx="10"/>
-          </p:nvPr>
-        </p:nvSpPr>
-        <p:spPr/>
-        <p:txBody>
-          <a:bodyPr/>
-          <a:lstStyle/>
-          <a:p>
-            <a:pPr marL="0" marR="0" lvl="0" indent="0" algn="r" defTabSz="431800" rtl="0" eaLnBrk="1" fontAlgn="auto" latinLnBrk="0" hangingPunct="1">
-              <a:lnSpc>
-                <a:spcPct val="100000"/>
-              </a:lnSpc>
-              <a:spcBef>
-                <a:spcPct val="0"/>
-              </a:spcBef>
-              <a:spcAft>
-                <a:spcPct val="0"/>
-              </a:spcAft>
-              <a:buClrTx/>
-              <a:buSzTx/>
-              <a:buFontTx/>
-              <a:buNone/>
-              <a:defRPr/>
-            </a:pPr>
-            <a:fld id="{51D65B7D-B529-4D68-BC16-03759A9C2313}" type="slidenum">
-              <a:rPr kumimoji="0" lang="en-US" altLang="zh-CN" sz="1100" b="0" i="0" u="none" strike="noStrike" kern="1200" cap="none" spc="0" normalizeH="0" baseline="0" noProof="1">
-                <a:ln>
-                  <a:noFill/>
-                </a:ln>
-                <a:solidFill>
-                  <a:schemeClr val="tx1">
-                    <a:lumMod val="75000"/>
-                    <a:lumOff val="25000"/>
-                  </a:schemeClr>
-                </a:solidFill>
-                <a:effectLst/>
-                <a:uLnTx/>
-                <a:uFillTx/>
-                <a:latin typeface="黑体" panose="02010609060101010101" pitchFamily="49" charset="-122"/>
-                <a:ea typeface="黑体" panose="02010609060101010101" pitchFamily="49" charset="-122"/>
-                <a:cs typeface="黑体" panose="02010609060101010101" pitchFamily="49" charset="-122"/>
-                <a:sym typeface="Calibri" panose="020F0502020204030204"/>
-              </a:rPr>
-              <a:t>‹#›</a:t>
-            </a:fld>
-            <a:endParaRPr kumimoji="0" lang="en-US" altLang="zh-CN" sz="1100" b="0" i="0" u="none" strike="noStrike" kern="1200" cap="none" spc="0" normalizeH="0" baseline="0" noProof="1">
-              <a:ln>
-                <a:noFill/>
-              </a:ln>
-              <a:solidFill>
-                <a:schemeClr val="tx1">
-                  <a:lumMod val="75000"/>
-                  <a:lumOff val="25000"/>
-                </a:schemeClr>
-              </a:solidFill>
-              <a:effectLst/>
-              <a:uLnTx/>
-              <a:uFillTx/>
-              <a:latin typeface="黑体" panose="02010609060101010101" pitchFamily="49" charset="-122"/>
-              <a:ea typeface="黑体" panose="02010609060101010101" pitchFamily="49" charset="-122"/>
-              <a:cs typeface="黑体" panose="02010609060101010101" pitchFamily="49" charset="-122"/>
-              <a:sym typeface="Calibri" panose="020F0502020204030204"/>
-            </a:endParaRPr>
-          </a:p>
-        </p:txBody>
-      </p:sp>
-    </p:spTree>
-  </p:cSld>
-  <p:clrMapOvr>
-    <a:masterClrMapping/>
-  </p:clrMapOvr>
-  <p:transition spd="med"/>
-</p:sldLayout>
-</file>
-
-<file path=ppt/slideLayouts/slideLayout3.xml><?xml version="1.0" encoding="utf-8"?>
 <p:sldLayout xmlns:a="http://schemas.openxmlformats.org/drawingml/2006/main" xmlns:r="http://schemas.openxmlformats.org/officeDocument/2006/relationships" xmlns:p="http://schemas.openxmlformats.org/presentationml/2006/main" preserve="1" userDrawn="1">
   <p:cSld name="5_自定义版式">
     <p:spTree>
@@ -2212,6 +1777,32 @@
           </a:prstGeom>
         </p:spPr>
       </p:pic>
+    </p:spTree>
+  </p:cSld>
+  <p:clrMapOvr>
+    <a:masterClrMapping/>
+  </p:clrMapOvr>
+  <p:transition spd="med"/>
+</p:sldLayout>
+</file>
+
+<file path=ppt/slideLayouts/slideLayout3.xml><?xml version="1.0" encoding="utf-8"?>
+<p:sldLayout xmlns:a="http://schemas.openxmlformats.org/drawingml/2006/main" xmlns:r="http://schemas.openxmlformats.org/officeDocument/2006/relationships" xmlns:p="http://schemas.openxmlformats.org/presentationml/2006/main">
+  <p:cSld>
+    <p:spTree>
+      <p:nvGrpSpPr>
+        <p:cNvPr id="1" name=""/>
+        <p:cNvGrpSpPr/>
+        <p:nvPr/>
+      </p:nvGrpSpPr>
+      <p:grpSpPr>
+        <a:xfrm>
+          <a:off x="0" y="0"/>
+          <a:ext cx="0" cy="0"/>
+          <a:chOff x="0" y="0"/>
+          <a:chExt cx="0" cy="0"/>
+        </a:xfrm>
+      </p:grpSpPr>
     </p:spTree>
   </p:cSld>
   <p:clrMapOvr>
@@ -2610,7 +2201,7 @@
           <p:nvPr userDrawn="1"/>
         </p:nvPicPr>
         <p:blipFill>
-          <a:blip r:embed="rId19"/>
+          <a:blip r:embed="rId18"/>
           <a:stretch>
             <a:fillRect/>
           </a:stretch>
@@ -2633,23 +2224,22 @@
   </p:cSld>
   <p:clrMap bg1="lt1" tx1="dk1" bg2="lt2" tx2="dk2" accent1="accent1" accent2="accent2" accent3="accent3" accent4="accent4" accent5="accent5" accent6="accent6" hlink="hlink" folHlink="folHlink"/>
   <p:sldLayoutIdLst>
-    <p:sldLayoutId id="2147483649" r:id="rId1"/>
-    <p:sldLayoutId id="2147483652" r:id="rId2"/>
-    <p:sldLayoutId id="2147483654" r:id="rId3"/>
-    <p:sldLayoutId id="2147483655" r:id="rId4"/>
-    <p:sldLayoutId id="2147483656" r:id="rId5"/>
-    <p:sldLayoutId id="2147483657" r:id="rId6"/>
-    <p:sldLayoutId id="2147483658" r:id="rId7"/>
-    <p:sldLayoutId id="2147483659" r:id="rId8"/>
-    <p:sldLayoutId id="2147483660" r:id="rId9"/>
-    <p:sldLayoutId id="2147483661" r:id="rId10"/>
-    <p:sldLayoutId id="2147483662" r:id="rId11"/>
-    <p:sldLayoutId id="2147483663" r:id="rId12"/>
-    <p:sldLayoutId id="2147483664" r:id="rId13"/>
-    <p:sldLayoutId id="2147483665" r:id="rId14"/>
-    <p:sldLayoutId id="2147483666" r:id="rId15"/>
-    <p:sldLayoutId id="2147483667" r:id="rId16"/>
-    <p:sldLayoutId id="2147483668" r:id="rId17"/>
+    <p:sldLayoutId id="2147483652" r:id="rId1"/>
+    <p:sldLayoutId id="2147483654" r:id="rId2"/>
+    <p:sldLayoutId id="2147483655" r:id="rId3"/>
+    <p:sldLayoutId id="2147483656" r:id="rId4"/>
+    <p:sldLayoutId id="2147483657" r:id="rId5"/>
+    <p:sldLayoutId id="2147483658" r:id="rId6"/>
+    <p:sldLayoutId id="2147483659" r:id="rId7"/>
+    <p:sldLayoutId id="2147483660" r:id="rId8"/>
+    <p:sldLayoutId id="2147483661" r:id="rId9"/>
+    <p:sldLayoutId id="2147483662" r:id="rId10"/>
+    <p:sldLayoutId id="2147483663" r:id="rId11"/>
+    <p:sldLayoutId id="2147483664" r:id="rId12"/>
+    <p:sldLayoutId id="2147483665" r:id="rId13"/>
+    <p:sldLayoutId id="2147483666" r:id="rId14"/>
+    <p:sldLayoutId id="2147483667" r:id="rId15"/>
+    <p:sldLayoutId id="2147483668" r:id="rId16"/>
   </p:sldLayoutIdLst>
   <p:transition spd="med"/>
   <p:hf sldNum="0" hdr="0" ftr="0" dt="0"/>
@@ -3372,124 +2962,6 @@
           <a:chExt cx="0" cy="0"/>
         </a:xfrm>
       </p:grpSpPr>
-      <p:sp>
-        <p:nvSpPr>
-          <p:cNvPr id="13" name="文本框 13"/>
-          <p:cNvSpPr txBox="1"/>
-          <p:nvPr/>
-        </p:nvSpPr>
-        <p:spPr>
-          <a:xfrm>
-            <a:off x="385265" y="5552947"/>
-            <a:ext cx="5687761" cy="326390"/>
-          </a:xfrm>
-          <a:prstGeom prst="rect">
-            <a:avLst/>
-          </a:prstGeom>
-          <a:ln w="12700">
-            <a:miter lim="400000"/>
-          </a:ln>
-        </p:spPr>
-        <p:txBody>
-          <a:bodyPr wrap="square" lIns="45711" rIns="45711">
-            <a:spAutoFit/>
-          </a:bodyPr>
-          <a:lstStyle/>
-          <a:p>
-            <a:pPr defTabSz="967740">
-              <a:lnSpc>
-                <a:spcPct val="170000"/>
-              </a:lnSpc>
-              <a:defRPr sz="1600">
-                <a:latin typeface="Heiti SC Medium" panose="02000000000000000000" charset="-122"/>
-                <a:ea typeface="Heiti SC Medium" panose="02000000000000000000" charset="-122"/>
-                <a:cs typeface="Heiti SC Medium" panose="02000000000000000000" charset="-122"/>
-                <a:sym typeface="Heiti SC Medium" panose="02000000000000000000" charset="-122"/>
-              </a:defRPr>
-            </a:pPr>
-            <a:endParaRPr lang="en-US" altLang="zh-CN" sz="900" dirty="0">
-              <a:solidFill>
-                <a:schemeClr val="tx1"/>
-              </a:solidFill>
-              <a:latin typeface="黑体" panose="02010609060101010101" pitchFamily="49" charset="-122"/>
-              <a:ea typeface="黑体" panose="02010609060101010101" pitchFamily="49" charset="-122"/>
-              <a:cs typeface="微软雅黑" panose="020B0503020204020204" charset="-122"/>
-            </a:endParaRPr>
-          </a:p>
-        </p:txBody>
-      </p:sp>
-      <p:sp>
-        <p:nvSpPr>
-          <p:cNvPr id="2" name="矩形 1">
-            <a:extLst>
-              <a:ext uri="{FF2B5EF4-FFF2-40B4-BE49-F238E27FC236}">
-                <a16:creationId xmlns:a16="http://schemas.microsoft.com/office/drawing/2014/main" id="{DBBA2D4E-F069-7801-17F8-2023325A2E91}"/>
-              </a:ext>
-            </a:extLst>
-          </p:cNvPr>
-          <p:cNvSpPr/>
-          <p:nvPr/>
-        </p:nvSpPr>
-        <p:spPr>
-          <a:xfrm>
-            <a:off x="9602595" y="215877"/>
-            <a:ext cx="1702827" cy="792055"/>
-          </a:xfrm>
-          <a:prstGeom prst="rect">
-            <a:avLst/>
-          </a:prstGeom>
-        </p:spPr>
-        <p:style>
-          <a:lnRef idx="2">
-            <a:schemeClr val="accent1">
-              <a:shade val="15000"/>
-            </a:schemeClr>
-          </a:lnRef>
-          <a:fillRef idx="1">
-            <a:schemeClr val="accent1"/>
-          </a:fillRef>
-          <a:effectRef idx="0">
-            <a:schemeClr val="accent1"/>
-          </a:effectRef>
-          <a:fontRef idx="minor">
-            <a:schemeClr val="lt1"/>
-          </a:fontRef>
-        </p:style>
-        <p:txBody>
-          <a:bodyPr rtlCol="0" anchor="ctr"/>
-          <a:lstStyle/>
-          <a:p>
-            <a:pPr algn="ctr"/>
-            <a:endParaRPr lang="zh-CN" altLang="en-US"/>
-          </a:p>
-        </p:txBody>
-      </p:sp>
-    </p:spTree>
-  </p:cSld>
-  <p:clrMapOvr>
-    <a:masterClrMapping/>
-  </p:clrMapOvr>
-  <p:transition spd="med"/>
-</p:sld>
-</file>
-
-<file path=ppt/slides/slide2.xml><?xml version="1.0" encoding="utf-8"?>
-<p:sld xmlns:a="http://schemas.openxmlformats.org/drawingml/2006/main" xmlns:r="http://schemas.openxmlformats.org/officeDocument/2006/relationships" xmlns:p="http://schemas.openxmlformats.org/presentationml/2006/main">
-  <p:cSld>
-    <p:spTree>
-      <p:nvGrpSpPr>
-        <p:cNvPr id="1" name=""/>
-        <p:cNvGrpSpPr/>
-        <p:nvPr/>
-      </p:nvGrpSpPr>
-      <p:grpSpPr>
-        <a:xfrm>
-          <a:off x="0" y="0"/>
-          <a:ext cx="0" cy="0"/>
-          <a:chOff x="0" y="0"/>
-          <a:chExt cx="0" cy="0"/>
-        </a:xfrm>
-      </p:grpSpPr>
       <p:pic>
         <p:nvPicPr>
           <p:cNvPr id="40" name="图片 39" descr="preencoded.png">
@@ -4748,6 +4220,117 @@
           </a:p>
         </p:txBody>
       </p:sp>
+      <p:grpSp>
+        <p:nvGrpSpPr>
+          <p:cNvPr id="41" name="组合 40">
+            <a:extLst>
+              <a:ext uri="{FF2B5EF4-FFF2-40B4-BE49-F238E27FC236}">
+                <a16:creationId xmlns:a16="http://schemas.microsoft.com/office/drawing/2014/main" id="{921A14C5-C9C0-4E54-87D6-BFBE5A15E558}"/>
+              </a:ext>
+            </a:extLst>
+          </p:cNvPr>
+          <p:cNvGrpSpPr/>
+          <p:nvPr/>
+        </p:nvGrpSpPr>
+        <p:grpSpPr>
+          <a:xfrm>
+            <a:off x="9577302" y="215877"/>
+            <a:ext cx="1695878" cy="706616"/>
+            <a:chOff x="9577302" y="1165376"/>
+            <a:chExt cx="1695878" cy="706616"/>
+          </a:xfrm>
+          <a:solidFill>
+            <a:schemeClr val="bg1"/>
+          </a:solidFill>
+        </p:grpSpPr>
+        <p:sp>
+          <p:nvSpPr>
+            <p:cNvPr id="42" name="矩形 41">
+              <a:extLst>
+                <a:ext uri="{FF2B5EF4-FFF2-40B4-BE49-F238E27FC236}">
+                  <a16:creationId xmlns:a16="http://schemas.microsoft.com/office/drawing/2014/main" id="{3CFF5B86-B5BA-64B2-BE85-5FF844DA784E}"/>
+                </a:ext>
+              </a:extLst>
+            </p:cNvPr>
+            <p:cNvSpPr/>
+            <p:nvPr/>
+          </p:nvSpPr>
+          <p:spPr>
+            <a:xfrm>
+              <a:off x="9721312" y="1295952"/>
+              <a:ext cx="1440100" cy="432030"/>
+            </a:xfrm>
+            <a:prstGeom prst="rect">
+              <a:avLst/>
+            </a:prstGeom>
+            <a:grpFill/>
+            <a:ln>
+              <a:noFill/>
+            </a:ln>
+          </p:spPr>
+          <p:style>
+            <a:lnRef idx="2">
+              <a:schemeClr val="accent1">
+                <a:shade val="15000"/>
+              </a:schemeClr>
+            </a:lnRef>
+            <a:fillRef idx="1">
+              <a:schemeClr val="accent1"/>
+            </a:fillRef>
+            <a:effectRef idx="0">
+              <a:schemeClr val="accent1"/>
+            </a:effectRef>
+            <a:fontRef idx="minor">
+              <a:schemeClr val="lt1"/>
+            </a:fontRef>
+          </p:style>
+          <p:txBody>
+            <a:bodyPr rtlCol="0" anchor="ctr"/>
+            <a:lstStyle/>
+            <a:p>
+              <a:pPr algn="ctr"/>
+              <a:endParaRPr lang="zh-CN" altLang="en-US"/>
+            </a:p>
+          </p:txBody>
+        </p:sp>
+        <p:pic>
+          <p:nvPicPr>
+            <p:cNvPr id="43" name="图片 42">
+              <a:extLst>
+                <a:ext uri="{FF2B5EF4-FFF2-40B4-BE49-F238E27FC236}">
+                  <a16:creationId xmlns:a16="http://schemas.microsoft.com/office/drawing/2014/main" id="{B3FECAAB-D368-6948-6032-CFB373257C8B}"/>
+                </a:ext>
+              </a:extLst>
+            </p:cNvPr>
+            <p:cNvPicPr>
+              <a:picLocks noChangeAspect="1"/>
+            </p:cNvPicPr>
+            <p:nvPr/>
+          </p:nvPicPr>
+          <p:blipFill>
+            <a:blip r:embed="rId12">
+              <a:extLst>
+                <a:ext uri="{28A0092B-C50C-407E-A947-70E740481C1C}">
+                  <a14:useLocalDpi xmlns:a14="http://schemas.microsoft.com/office/drawing/2010/main" val="0"/>
+                </a:ext>
+              </a:extLst>
+            </a:blip>
+            <a:stretch>
+              <a:fillRect/>
+            </a:stretch>
+          </p:blipFill>
+          <p:spPr>
+            <a:xfrm>
+              <a:off x="9577302" y="1165376"/>
+              <a:ext cx="1695878" cy="706616"/>
+            </a:xfrm>
+            <a:prstGeom prst="rect">
+              <a:avLst/>
+            </a:prstGeom>
+            <a:grpFill/>
+          </p:spPr>
+        </p:pic>
+      </p:grpSp>
     </p:spTree>
   </p:cSld>
   <p:clrMapOvr>
@@ -4757,7 +4340,7 @@
 </p:sld>
 </file>
 
-<file path=ppt/slides/slide3.xml><?xml version="1.0" encoding="utf-8"?>
+<file path=ppt/slides/slide2.xml><?xml version="1.0" encoding="utf-8"?>
 <p:sld xmlns:a="http://schemas.openxmlformats.org/drawingml/2006/main" xmlns:r="http://schemas.openxmlformats.org/officeDocument/2006/relationships" xmlns:p="http://schemas.openxmlformats.org/presentationml/2006/main">
   <p:cSld>
     <p:spTree>
@@ -6835,6 +6418,117 @@
           </a:p>
         </p:txBody>
       </p:sp>
+      <p:grpSp>
+        <p:nvGrpSpPr>
+          <p:cNvPr id="3" name="组合 2">
+            <a:extLst>
+              <a:ext uri="{FF2B5EF4-FFF2-40B4-BE49-F238E27FC236}">
+                <a16:creationId xmlns:a16="http://schemas.microsoft.com/office/drawing/2014/main" id="{88B7FE21-260D-AFD9-CB01-1AE180AA073B}"/>
+              </a:ext>
+            </a:extLst>
+          </p:cNvPr>
+          <p:cNvGrpSpPr/>
+          <p:nvPr/>
+        </p:nvGrpSpPr>
+        <p:grpSpPr>
+          <a:xfrm>
+            <a:off x="9577302" y="215877"/>
+            <a:ext cx="1695878" cy="706616"/>
+            <a:chOff x="9577302" y="1165376"/>
+            <a:chExt cx="1695878" cy="706616"/>
+          </a:xfrm>
+          <a:solidFill>
+            <a:schemeClr val="bg1"/>
+          </a:solidFill>
+        </p:grpSpPr>
+        <p:sp>
+          <p:nvSpPr>
+            <p:cNvPr id="57" name="矩形 56">
+              <a:extLst>
+                <a:ext uri="{FF2B5EF4-FFF2-40B4-BE49-F238E27FC236}">
+                  <a16:creationId xmlns:a16="http://schemas.microsoft.com/office/drawing/2014/main" id="{C23BCC0B-79B2-9127-1AE3-D2148436A3A7}"/>
+                </a:ext>
+              </a:extLst>
+            </p:cNvPr>
+            <p:cNvSpPr/>
+            <p:nvPr/>
+          </p:nvSpPr>
+          <p:spPr>
+            <a:xfrm>
+              <a:off x="9721312" y="1295952"/>
+              <a:ext cx="1440100" cy="432030"/>
+            </a:xfrm>
+            <a:prstGeom prst="rect">
+              <a:avLst/>
+            </a:prstGeom>
+            <a:grpFill/>
+            <a:ln>
+              <a:noFill/>
+            </a:ln>
+          </p:spPr>
+          <p:style>
+            <a:lnRef idx="2">
+              <a:schemeClr val="accent1">
+                <a:shade val="15000"/>
+              </a:schemeClr>
+            </a:lnRef>
+            <a:fillRef idx="1">
+              <a:schemeClr val="accent1"/>
+            </a:fillRef>
+            <a:effectRef idx="0">
+              <a:schemeClr val="accent1"/>
+            </a:effectRef>
+            <a:fontRef idx="minor">
+              <a:schemeClr val="lt1"/>
+            </a:fontRef>
+          </p:style>
+          <p:txBody>
+            <a:bodyPr rtlCol="0" anchor="ctr"/>
+            <a:lstStyle/>
+            <a:p>
+              <a:pPr algn="ctr"/>
+              <a:endParaRPr lang="zh-CN" altLang="en-US"/>
+            </a:p>
+          </p:txBody>
+        </p:sp>
+        <p:pic>
+          <p:nvPicPr>
+            <p:cNvPr id="59" name="图片 58">
+              <a:extLst>
+                <a:ext uri="{FF2B5EF4-FFF2-40B4-BE49-F238E27FC236}">
+                  <a16:creationId xmlns:a16="http://schemas.microsoft.com/office/drawing/2014/main" id="{36E4DA6A-4577-AD3F-6FBA-64443BD60FD3}"/>
+                </a:ext>
+              </a:extLst>
+            </p:cNvPr>
+            <p:cNvPicPr>
+              <a:picLocks noChangeAspect="1"/>
+            </p:cNvPicPr>
+            <p:nvPr/>
+          </p:nvPicPr>
+          <p:blipFill>
+            <a:blip r:embed="rId8">
+              <a:extLst>
+                <a:ext uri="{28A0092B-C50C-407E-A947-70E740481C1C}">
+                  <a14:useLocalDpi xmlns:a14="http://schemas.microsoft.com/office/drawing/2010/main" val="0"/>
+                </a:ext>
+              </a:extLst>
+            </a:blip>
+            <a:stretch>
+              <a:fillRect/>
+            </a:stretch>
+          </p:blipFill>
+          <p:spPr>
+            <a:xfrm>
+              <a:off x="9577302" y="1165376"/>
+              <a:ext cx="1695878" cy="706616"/>
+            </a:xfrm>
+            <a:prstGeom prst="rect">
+              <a:avLst/>
+            </a:prstGeom>
+            <a:grpFill/>
+          </p:spPr>
+        </p:pic>
+      </p:grpSp>
     </p:spTree>
   </p:cSld>
   <p:clrMapOvr>
@@ -6844,7 +6538,7 @@
 </p:sld>
 </file>
 
-<file path=ppt/slides/slide4.xml><?xml version="1.0" encoding="utf-8"?>
+<file path=ppt/slides/slide3.xml><?xml version="1.0" encoding="utf-8"?>
 <p:sld xmlns:a="http://schemas.openxmlformats.org/drawingml/2006/main" xmlns:r="http://schemas.openxmlformats.org/officeDocument/2006/relationships" xmlns:p="http://schemas.openxmlformats.org/presentationml/2006/main">
   <p:cSld>
     <p:spTree>
@@ -8819,6 +8513,117 @@
           </a:p>
         </p:txBody>
       </p:sp>
+      <p:grpSp>
+        <p:nvGrpSpPr>
+          <p:cNvPr id="3" name="组合 2">
+            <a:extLst>
+              <a:ext uri="{FF2B5EF4-FFF2-40B4-BE49-F238E27FC236}">
+                <a16:creationId xmlns:a16="http://schemas.microsoft.com/office/drawing/2014/main" id="{D4D58FFB-D48F-7A56-94A2-010ABBB67E90}"/>
+              </a:ext>
+            </a:extLst>
+          </p:cNvPr>
+          <p:cNvGrpSpPr/>
+          <p:nvPr/>
+        </p:nvGrpSpPr>
+        <p:grpSpPr>
+          <a:xfrm>
+            <a:off x="9577302" y="215877"/>
+            <a:ext cx="1695878" cy="706616"/>
+            <a:chOff x="9577302" y="1165376"/>
+            <a:chExt cx="1695878" cy="706616"/>
+          </a:xfrm>
+          <a:solidFill>
+            <a:schemeClr val="bg1"/>
+          </a:solidFill>
+        </p:grpSpPr>
+        <p:sp>
+          <p:nvSpPr>
+            <p:cNvPr id="64" name="矩形 63">
+              <a:extLst>
+                <a:ext uri="{FF2B5EF4-FFF2-40B4-BE49-F238E27FC236}">
+                  <a16:creationId xmlns:a16="http://schemas.microsoft.com/office/drawing/2014/main" id="{0B571C48-1F56-9299-8137-4C1254C822C3}"/>
+                </a:ext>
+              </a:extLst>
+            </p:cNvPr>
+            <p:cNvSpPr/>
+            <p:nvPr/>
+          </p:nvSpPr>
+          <p:spPr>
+            <a:xfrm>
+              <a:off x="9721312" y="1295952"/>
+              <a:ext cx="1440100" cy="432030"/>
+            </a:xfrm>
+            <a:prstGeom prst="rect">
+              <a:avLst/>
+            </a:prstGeom>
+            <a:grpFill/>
+            <a:ln>
+              <a:noFill/>
+            </a:ln>
+          </p:spPr>
+          <p:style>
+            <a:lnRef idx="2">
+              <a:schemeClr val="accent1">
+                <a:shade val="15000"/>
+              </a:schemeClr>
+            </a:lnRef>
+            <a:fillRef idx="1">
+              <a:schemeClr val="accent1"/>
+            </a:fillRef>
+            <a:effectRef idx="0">
+              <a:schemeClr val="accent1"/>
+            </a:effectRef>
+            <a:fontRef idx="minor">
+              <a:schemeClr val="lt1"/>
+            </a:fontRef>
+          </p:style>
+          <p:txBody>
+            <a:bodyPr rtlCol="0" anchor="ctr"/>
+            <a:lstStyle/>
+            <a:p>
+              <a:pPr algn="ctr"/>
+              <a:endParaRPr lang="zh-CN" altLang="en-US"/>
+            </a:p>
+          </p:txBody>
+        </p:sp>
+        <p:pic>
+          <p:nvPicPr>
+            <p:cNvPr id="66" name="图片 65">
+              <a:extLst>
+                <a:ext uri="{FF2B5EF4-FFF2-40B4-BE49-F238E27FC236}">
+                  <a16:creationId xmlns:a16="http://schemas.microsoft.com/office/drawing/2014/main" id="{B4D0AB46-0D1E-1BAE-C4AB-763E02747B81}"/>
+                </a:ext>
+              </a:extLst>
+            </p:cNvPr>
+            <p:cNvPicPr>
+              <a:picLocks noChangeAspect="1"/>
+            </p:cNvPicPr>
+            <p:nvPr/>
+          </p:nvPicPr>
+          <p:blipFill>
+            <a:blip r:embed="rId10">
+              <a:extLst>
+                <a:ext uri="{28A0092B-C50C-407E-A947-70E740481C1C}">
+                  <a14:useLocalDpi xmlns:a14="http://schemas.microsoft.com/office/drawing/2010/main" val="0"/>
+                </a:ext>
+              </a:extLst>
+            </a:blip>
+            <a:stretch>
+              <a:fillRect/>
+            </a:stretch>
+          </p:blipFill>
+          <p:spPr>
+            <a:xfrm>
+              <a:off x="9577302" y="1165376"/>
+              <a:ext cx="1695878" cy="706616"/>
+            </a:xfrm>
+            <a:prstGeom prst="rect">
+              <a:avLst/>
+            </a:prstGeom>
+            <a:grpFill/>
+          </p:spPr>
+        </p:pic>
+      </p:grpSp>
     </p:spTree>
   </p:cSld>
   <p:clrMapOvr>
@@ -8828,7 +8633,7 @@
 </p:sld>
 </file>
 
-<file path=ppt/slides/slide5.xml><?xml version="1.0" encoding="utf-8"?>
+<file path=ppt/slides/slide4.xml><?xml version="1.0" encoding="utf-8"?>
 <p:sld xmlns:a="http://schemas.openxmlformats.org/drawingml/2006/main" xmlns:r="http://schemas.openxmlformats.org/officeDocument/2006/relationships" xmlns:p="http://schemas.openxmlformats.org/presentationml/2006/main">
   <p:cSld>
     <p:spTree>
@@ -9922,6 +9727,117 @@
           </a:p>
         </p:txBody>
       </p:sp>
+      <p:grpSp>
+        <p:nvGrpSpPr>
+          <p:cNvPr id="3" name="组合 2">
+            <a:extLst>
+              <a:ext uri="{FF2B5EF4-FFF2-40B4-BE49-F238E27FC236}">
+                <a16:creationId xmlns:a16="http://schemas.microsoft.com/office/drawing/2014/main" id="{329D934A-F4BE-BBE9-F46E-5806CCC1A65D}"/>
+              </a:ext>
+            </a:extLst>
+          </p:cNvPr>
+          <p:cNvGrpSpPr/>
+          <p:nvPr/>
+        </p:nvGrpSpPr>
+        <p:grpSpPr>
+          <a:xfrm>
+            <a:off x="9577302" y="215877"/>
+            <a:ext cx="1695878" cy="706616"/>
+            <a:chOff x="9577302" y="1165376"/>
+            <a:chExt cx="1695878" cy="706616"/>
+          </a:xfrm>
+          <a:solidFill>
+            <a:schemeClr val="bg1"/>
+          </a:solidFill>
+        </p:grpSpPr>
+        <p:sp>
+          <p:nvSpPr>
+            <p:cNvPr id="32" name="矩形 31">
+              <a:extLst>
+                <a:ext uri="{FF2B5EF4-FFF2-40B4-BE49-F238E27FC236}">
+                  <a16:creationId xmlns:a16="http://schemas.microsoft.com/office/drawing/2014/main" id="{DC0F51B2-457D-50DE-61E6-10F170A9036E}"/>
+                </a:ext>
+              </a:extLst>
+            </p:cNvPr>
+            <p:cNvSpPr/>
+            <p:nvPr/>
+          </p:nvSpPr>
+          <p:spPr>
+            <a:xfrm>
+              <a:off x="9721312" y="1295952"/>
+              <a:ext cx="1440100" cy="432030"/>
+            </a:xfrm>
+            <a:prstGeom prst="rect">
+              <a:avLst/>
+            </a:prstGeom>
+            <a:grpFill/>
+            <a:ln>
+              <a:noFill/>
+            </a:ln>
+          </p:spPr>
+          <p:style>
+            <a:lnRef idx="2">
+              <a:schemeClr val="accent1">
+                <a:shade val="15000"/>
+              </a:schemeClr>
+            </a:lnRef>
+            <a:fillRef idx="1">
+              <a:schemeClr val="accent1"/>
+            </a:fillRef>
+            <a:effectRef idx="0">
+              <a:schemeClr val="accent1"/>
+            </a:effectRef>
+            <a:fontRef idx="minor">
+              <a:schemeClr val="lt1"/>
+            </a:fontRef>
+          </p:style>
+          <p:txBody>
+            <a:bodyPr rtlCol="0" anchor="ctr"/>
+            <a:lstStyle/>
+            <a:p>
+              <a:pPr algn="ctr"/>
+              <a:endParaRPr lang="zh-CN" altLang="en-US"/>
+            </a:p>
+          </p:txBody>
+        </p:sp>
+        <p:pic>
+          <p:nvPicPr>
+            <p:cNvPr id="34" name="图片 33">
+              <a:extLst>
+                <a:ext uri="{FF2B5EF4-FFF2-40B4-BE49-F238E27FC236}">
+                  <a16:creationId xmlns:a16="http://schemas.microsoft.com/office/drawing/2014/main" id="{37F5D3BD-FC34-1A13-01C0-4A7D324D19F7}"/>
+                </a:ext>
+              </a:extLst>
+            </p:cNvPr>
+            <p:cNvPicPr>
+              <a:picLocks noChangeAspect="1"/>
+            </p:cNvPicPr>
+            <p:nvPr/>
+          </p:nvPicPr>
+          <p:blipFill>
+            <a:blip r:embed="rId8">
+              <a:extLst>
+                <a:ext uri="{28A0092B-C50C-407E-A947-70E740481C1C}">
+                  <a14:useLocalDpi xmlns:a14="http://schemas.microsoft.com/office/drawing/2010/main" val="0"/>
+                </a:ext>
+              </a:extLst>
+            </a:blip>
+            <a:stretch>
+              <a:fillRect/>
+            </a:stretch>
+          </p:blipFill>
+          <p:spPr>
+            <a:xfrm>
+              <a:off x="9577302" y="1165376"/>
+              <a:ext cx="1695878" cy="706616"/>
+            </a:xfrm>
+            <a:prstGeom prst="rect">
+              <a:avLst/>
+            </a:prstGeom>
+            <a:grpFill/>
+          </p:spPr>
+        </p:pic>
+      </p:grpSp>
     </p:spTree>
   </p:cSld>
   <p:clrMapOvr>
@@ -9931,7 +9847,7 @@
 </p:sld>
 </file>
 
-<file path=ppt/slides/slide6.xml><?xml version="1.0" encoding="utf-8"?>
+<file path=ppt/slides/slide5.xml><?xml version="1.0" encoding="utf-8"?>
 <p:sld xmlns:a="http://schemas.openxmlformats.org/drawingml/2006/main" xmlns:r="http://schemas.openxmlformats.org/officeDocument/2006/relationships" xmlns:p="http://schemas.openxmlformats.org/presentationml/2006/main">
   <p:cSld>
     <p:spTree>
@@ -11305,460 +11221,117 @@
           </a:p>
         </p:txBody>
       </p:sp>
-    </p:spTree>
-  </p:cSld>
-  <p:clrMapOvr>
-    <a:masterClrMapping/>
-  </p:clrMapOvr>
-  <p:transition spd="med"/>
-</p:sld>
-</file>
-
-<file path=ppt/slides/slide7.xml><?xml version="1.0" encoding="utf-8"?>
-<p:sld xmlns:a="http://schemas.openxmlformats.org/drawingml/2006/main" xmlns:r="http://schemas.openxmlformats.org/officeDocument/2006/relationships" xmlns:p="http://schemas.openxmlformats.org/presentationml/2006/main">
-  <p:cSld>
-    <p:spTree>
-      <p:nvGrpSpPr>
-        <p:cNvPr id="1" name=""/>
-        <p:cNvGrpSpPr/>
-        <p:nvPr/>
-      </p:nvGrpSpPr>
-      <p:grpSpPr>
-        <a:xfrm>
-          <a:off x="0" y="0"/>
-          <a:ext cx="0" cy="0"/>
-          <a:chOff x="0" y="0"/>
-          <a:chExt cx="0" cy="0"/>
-        </a:xfrm>
-      </p:grpSpPr>
-      <p:sp>
-        <p:nvSpPr>
-          <p:cNvPr id="2" name="Rectangle 1"/>
-          <p:cNvSpPr/>
-          <p:nvPr/>
-        </p:nvSpPr>
-        <p:spPr>
-          <a:xfrm>
-            <a:off x="882" y="-1"/>
-            <a:ext cx="15360031" cy="207366"/>
-          </a:xfrm>
-          <a:prstGeom prst="rect">
-            <a:avLst/>
-          </a:prstGeom>
+      <p:grpSp>
+        <p:nvGrpSpPr>
+          <p:cNvPr id="3" name="组合 2">
+            <a:extLst>
+              <a:ext uri="{FF2B5EF4-FFF2-40B4-BE49-F238E27FC236}">
+                <a16:creationId xmlns:a16="http://schemas.microsoft.com/office/drawing/2014/main" id="{20A1DB10-B665-ECA4-3990-4EAE782AB698}"/>
+              </a:ext>
+            </a:extLst>
+          </p:cNvPr>
+          <p:cNvGrpSpPr/>
+          <p:nvPr/>
+        </p:nvGrpSpPr>
+        <p:grpSpPr>
+          <a:xfrm>
+            <a:off x="9577302" y="215877"/>
+            <a:ext cx="1695878" cy="706616"/>
+            <a:chOff x="9577302" y="1165376"/>
+            <a:chExt cx="1695878" cy="706616"/>
+          </a:xfrm>
           <a:solidFill>
-            <a:srgbClr val="1565C0"/>
+            <a:schemeClr val="bg1"/>
           </a:solidFill>
-          <a:ln>
-            <a:noFill/>
-          </a:ln>
-        </p:spPr>
-        <p:style>
-          <a:lnRef idx="1">
-            <a:schemeClr val="accent1"/>
-          </a:lnRef>
-          <a:fillRef idx="3">
-            <a:schemeClr val="accent1"/>
-          </a:fillRef>
-          <a:effectRef idx="2">
-            <a:schemeClr val="accent1"/>
-          </a:effectRef>
-          <a:fontRef idx="minor">
-            <a:schemeClr val="lt1"/>
-          </a:fontRef>
-        </p:style>
-        <p:txBody>
-          <a:bodyPr rtlCol="0" anchor="ctr"/>
-          <a:lstStyle/>
-          <a:p>
-            <a:pPr algn="ctr"/>
-            <a:endParaRPr sz="2142"/>
-          </a:p>
-        </p:txBody>
-      </p:sp>
-      <p:sp>
-        <p:nvSpPr>
-          <p:cNvPr id="3" name="TextBox 2"/>
-          <p:cNvSpPr txBox="1"/>
-          <p:nvPr/>
-        </p:nvSpPr>
-        <p:spPr>
-          <a:xfrm>
-            <a:off x="634499" y="403211"/>
-            <a:ext cx="1976823" cy="325025"/>
-          </a:xfrm>
-          <a:prstGeom prst="rect">
-            <a:avLst/>
-          </a:prstGeom>
-          <a:noFill/>
-        </p:spPr>
-        <p:txBody>
-          <a:bodyPr wrap="none">
-            <a:spAutoFit/>
-          </a:bodyPr>
-          <a:lstStyle/>
-          <a:p>
-            <a:r>
-              <a:rPr sz="1512" b="1">
-                <a:solidFill>
-                  <a:srgbClr val="1A3A6B"/>
-                </a:solidFill>
-                <a:latin typeface="Microsoft YaHei"/>
-              </a:rPr>
-              <a:t>中驰智能PPT Demo</a:t>
-            </a:r>
-          </a:p>
-        </p:txBody>
-      </p:sp>
-      <p:sp>
-        <p:nvSpPr>
-          <p:cNvPr id="4" name="TextBox 3"/>
-          <p:cNvSpPr txBox="1"/>
-          <p:nvPr/>
-        </p:nvSpPr>
-        <p:spPr>
-          <a:xfrm>
-            <a:off x="11982887" y="403211"/>
-            <a:ext cx="2085827" cy="305596"/>
-          </a:xfrm>
-          <a:prstGeom prst="rect">
-            <a:avLst/>
-          </a:prstGeom>
-          <a:noFill/>
-        </p:spPr>
-        <p:txBody>
-          <a:bodyPr wrap="none">
-            <a:spAutoFit/>
-          </a:bodyPr>
-          <a:lstStyle/>
-          <a:p>
-            <a:r>
-              <a:rPr sz="1386" b="1">
-                <a:solidFill>
-                  <a:srgbClr val="CA8A04"/>
-                </a:solidFill>
-                <a:latin typeface="Microsoft YaHei"/>
-              </a:rPr>
-              <a:t>M1/M2 | 项目生成信息</a:t>
-            </a:r>
-          </a:p>
-        </p:txBody>
-      </p:sp>
-      <p:sp>
-        <p:nvSpPr>
-          <p:cNvPr id="5" name="TextBox 4"/>
-          <p:cNvSpPr txBox="1"/>
-          <p:nvPr/>
-        </p:nvSpPr>
-        <p:spPr>
-          <a:xfrm>
-            <a:off x="807304" y="806422"/>
-            <a:ext cx="2714205" cy="596445"/>
-          </a:xfrm>
-          <a:prstGeom prst="rect">
-            <a:avLst/>
-          </a:prstGeom>
-          <a:noFill/>
-        </p:spPr>
-        <p:txBody>
-          <a:bodyPr wrap="none">
-            <a:spAutoFit/>
-          </a:bodyPr>
-          <a:lstStyle/>
-          <a:p>
-            <a:r>
-              <a:rPr sz="3276" b="1">
-                <a:solidFill>
-                  <a:srgbClr val="1A3A6B"/>
-                </a:solidFill>
-                <a:latin typeface="Microsoft YaHei"/>
-              </a:rPr>
-              <a:t>项目生成信息</a:t>
-            </a:r>
-          </a:p>
-        </p:txBody>
-      </p:sp>
-      <p:sp>
-        <p:nvSpPr>
-          <p:cNvPr id="6" name="Rectangle 5"/>
-          <p:cNvSpPr/>
-          <p:nvPr/>
-        </p:nvSpPr>
-        <p:spPr>
-          <a:xfrm>
-            <a:off x="807303" y="1555241"/>
-            <a:ext cx="2304062" cy="69122"/>
-          </a:xfrm>
-          <a:prstGeom prst="rect">
-            <a:avLst/>
-          </a:prstGeom>
-          <a:solidFill>
-            <a:srgbClr val="1565C0"/>
-          </a:solidFill>
-          <a:ln>
-            <a:noFill/>
-          </a:ln>
-        </p:spPr>
-        <p:style>
-          <a:lnRef idx="1">
-            <a:schemeClr val="accent1"/>
-          </a:lnRef>
-          <a:fillRef idx="3">
-            <a:schemeClr val="accent1"/>
-          </a:fillRef>
-          <a:effectRef idx="2">
-            <a:schemeClr val="accent1"/>
-          </a:effectRef>
-          <a:fontRef idx="minor">
-            <a:schemeClr val="lt1"/>
-          </a:fontRef>
-        </p:style>
-        <p:txBody>
-          <a:bodyPr rtlCol="0" anchor="ctr"/>
-          <a:lstStyle/>
-          <a:p>
-            <a:pPr algn="ctr"/>
-            <a:endParaRPr sz="2142"/>
-          </a:p>
-        </p:txBody>
-      </p:sp>
-      <p:sp>
-        <p:nvSpPr>
-          <p:cNvPr id="7" name="TextBox 6"/>
-          <p:cNvSpPr txBox="1"/>
-          <p:nvPr/>
-        </p:nvSpPr>
-        <p:spPr>
-          <a:xfrm>
-            <a:off x="1037710" y="1900851"/>
-            <a:ext cx="3496022" cy="402546"/>
-          </a:xfrm>
-          <a:prstGeom prst="rect">
-            <a:avLst/>
-          </a:prstGeom>
-          <a:noFill/>
-        </p:spPr>
-        <p:txBody>
-          <a:bodyPr wrap="none">
-            <a:spAutoFit/>
-          </a:bodyPr>
-          <a:lstStyle/>
-          <a:p>
-            <a:r>
-              <a:rPr sz="2016">
-                <a:solidFill>
-                  <a:srgbClr val="1F2937"/>
-                </a:solidFill>
-                <a:latin typeface="Microsoft YaHei"/>
-              </a:rPr>
-              <a:t>项目名称：{{project_name}}</a:t>
-            </a:r>
-          </a:p>
-        </p:txBody>
-      </p:sp>
-      <p:sp>
-        <p:nvSpPr>
-          <p:cNvPr id="8" name="TextBox 7"/>
-          <p:cNvSpPr txBox="1"/>
-          <p:nvPr/>
-        </p:nvSpPr>
-        <p:spPr>
-          <a:xfrm>
-            <a:off x="1037710" y="2534468"/>
-            <a:ext cx="4058675" cy="402546"/>
-          </a:xfrm>
-          <a:prstGeom prst="rect">
-            <a:avLst/>
-          </a:prstGeom>
-          <a:noFill/>
-        </p:spPr>
-        <p:txBody>
-          <a:bodyPr wrap="none">
-            <a:spAutoFit/>
-          </a:bodyPr>
-          <a:lstStyle/>
-          <a:p>
-            <a:r>
-              <a:rPr sz="2016">
-                <a:solidFill>
-                  <a:srgbClr val="1F2937"/>
-                </a:solidFill>
-                <a:latin typeface="Microsoft YaHei"/>
-              </a:rPr>
-              <a:t>项目所在地：{{project_location}}</a:t>
-            </a:r>
-          </a:p>
-        </p:txBody>
-      </p:sp>
-      <p:sp>
-        <p:nvSpPr>
-          <p:cNvPr id="9" name="TextBox 8"/>
-          <p:cNvSpPr txBox="1"/>
-          <p:nvPr/>
-        </p:nvSpPr>
-        <p:spPr>
-          <a:xfrm>
-            <a:off x="1037710" y="3168085"/>
-            <a:ext cx="3820277" cy="402546"/>
-          </a:xfrm>
-          <a:prstGeom prst="rect">
-            <a:avLst/>
-          </a:prstGeom>
-          <a:noFill/>
-        </p:spPr>
-        <p:txBody>
-          <a:bodyPr wrap="none">
-            <a:spAutoFit/>
-          </a:bodyPr>
-          <a:lstStyle/>
-          <a:p>
-            <a:r>
-              <a:rPr sz="2016">
-                <a:solidFill>
-                  <a:srgbClr val="1F2937"/>
-                </a:solidFill>
-                <a:latin typeface="Microsoft YaHei"/>
-              </a:rPr>
-              <a:t>建设/业主单位：{{owner_unit}}</a:t>
-            </a:r>
-          </a:p>
-        </p:txBody>
-      </p:sp>
-      <p:sp>
-        <p:nvSpPr>
-          <p:cNvPr id="10" name="TextBox 9"/>
-          <p:cNvSpPr txBox="1"/>
-          <p:nvPr/>
-        </p:nvSpPr>
-        <p:spPr>
-          <a:xfrm>
-            <a:off x="1037710" y="3801702"/>
-            <a:ext cx="3098477" cy="402546"/>
-          </a:xfrm>
-          <a:prstGeom prst="rect">
-            <a:avLst/>
-          </a:prstGeom>
-          <a:noFill/>
-        </p:spPr>
-        <p:txBody>
-          <a:bodyPr wrap="none">
-            <a:spAutoFit/>
-          </a:bodyPr>
-          <a:lstStyle/>
-          <a:p>
-            <a:r>
-              <a:rPr sz="2016">
-                <a:solidFill>
-                  <a:srgbClr val="1F2937"/>
-                </a:solidFill>
-                <a:latin typeface="Microsoft YaHei"/>
-              </a:rPr>
-              <a:t>产品线：{{product_line}}</a:t>
-            </a:r>
-          </a:p>
-        </p:txBody>
-      </p:sp>
-      <p:sp>
-        <p:nvSpPr>
-          <p:cNvPr id="11" name="TextBox 10"/>
-          <p:cNvSpPr txBox="1"/>
-          <p:nvPr/>
-        </p:nvSpPr>
-        <p:spPr>
-          <a:xfrm>
-            <a:off x="1037710" y="4435319"/>
-            <a:ext cx="3071675" cy="402546"/>
-          </a:xfrm>
-          <a:prstGeom prst="rect">
-            <a:avLst/>
-          </a:prstGeom>
-          <a:noFill/>
-        </p:spPr>
-        <p:txBody>
-          <a:bodyPr wrap="none">
-            <a:spAutoFit/>
-          </a:bodyPr>
-          <a:lstStyle/>
-          <a:p>
-            <a:r>
-              <a:rPr sz="2016">
-                <a:solidFill>
-                  <a:srgbClr val="1F2937"/>
-                </a:solidFill>
-                <a:latin typeface="Microsoft YaHei"/>
-              </a:rPr>
-              <a:t>线路名称：{{line_name}}</a:t>
-            </a:r>
-          </a:p>
-        </p:txBody>
-      </p:sp>
-      <p:sp>
-        <p:nvSpPr>
-          <p:cNvPr id="12" name="TextBox 11"/>
-          <p:cNvSpPr txBox="1"/>
-          <p:nvPr/>
-        </p:nvSpPr>
-        <p:spPr>
-          <a:xfrm>
-            <a:off x="1037710" y="5068937"/>
-            <a:ext cx="3788858" cy="402546"/>
-          </a:xfrm>
-          <a:prstGeom prst="rect">
-            <a:avLst/>
-          </a:prstGeom>
-          <a:noFill/>
-        </p:spPr>
-        <p:txBody>
-          <a:bodyPr wrap="none">
-            <a:spAutoFit/>
-          </a:bodyPr>
-          <a:lstStyle/>
-          <a:p>
-            <a:r>
-              <a:rPr sz="2016">
-                <a:solidFill>
-                  <a:srgbClr val="1F2937"/>
-                </a:solidFill>
-                <a:latin typeface="Microsoft YaHei"/>
-              </a:rPr>
-              <a:t>现场痛点：{{site_pain_points}}</a:t>
-            </a:r>
-          </a:p>
-        </p:txBody>
-      </p:sp>
-      <p:sp>
-        <p:nvSpPr>
-          <p:cNvPr id="13" name="TextBox 12"/>
-          <p:cNvSpPr txBox="1"/>
-          <p:nvPr/>
-        </p:nvSpPr>
-        <p:spPr>
-          <a:xfrm>
-            <a:off x="1037710" y="5702554"/>
-            <a:ext cx="4515980" cy="402546"/>
-          </a:xfrm>
-          <a:prstGeom prst="rect">
-            <a:avLst/>
-          </a:prstGeom>
-          <a:noFill/>
-        </p:spPr>
-        <p:txBody>
-          <a:bodyPr wrap="none">
-            <a:spAutoFit/>
-          </a:bodyPr>
-          <a:lstStyle/>
-          <a:p>
-            <a:r>
-              <a:rPr sz="2016">
-                <a:solidFill>
-                  <a:srgbClr val="1F2937"/>
-                </a:solidFill>
-                <a:latin typeface="Microsoft YaHei"/>
-              </a:rPr>
-              <a:t>施工场景：{{construction_scenario}}</a:t>
-            </a:r>
-          </a:p>
-        </p:txBody>
-      </p:sp>
+        </p:grpSpPr>
+        <p:sp>
+          <p:nvSpPr>
+            <p:cNvPr id="41" name="矩形 40">
+              <a:extLst>
+                <a:ext uri="{FF2B5EF4-FFF2-40B4-BE49-F238E27FC236}">
+                  <a16:creationId xmlns:a16="http://schemas.microsoft.com/office/drawing/2014/main" id="{1794494E-D055-0C76-1AA9-E61769398AE6}"/>
+                </a:ext>
+              </a:extLst>
+            </p:cNvPr>
+            <p:cNvSpPr/>
+            <p:nvPr/>
+          </p:nvSpPr>
+          <p:spPr>
+            <a:xfrm>
+              <a:off x="9721312" y="1295952"/>
+              <a:ext cx="1440100" cy="432030"/>
+            </a:xfrm>
+            <a:prstGeom prst="rect">
+              <a:avLst/>
+            </a:prstGeom>
+            <a:grpFill/>
+            <a:ln>
+              <a:noFill/>
+            </a:ln>
+          </p:spPr>
+          <p:style>
+            <a:lnRef idx="2">
+              <a:schemeClr val="accent1">
+                <a:shade val="15000"/>
+              </a:schemeClr>
+            </a:lnRef>
+            <a:fillRef idx="1">
+              <a:schemeClr val="accent1"/>
+            </a:fillRef>
+            <a:effectRef idx="0">
+              <a:schemeClr val="accent1"/>
+            </a:effectRef>
+            <a:fontRef idx="minor">
+              <a:schemeClr val="lt1"/>
+            </a:fontRef>
+          </p:style>
+          <p:txBody>
+            <a:bodyPr rtlCol="0" anchor="ctr"/>
+            <a:lstStyle/>
+            <a:p>
+              <a:pPr algn="ctr"/>
+              <a:endParaRPr lang="zh-CN" altLang="en-US"/>
+            </a:p>
+          </p:txBody>
+        </p:sp>
+        <p:pic>
+          <p:nvPicPr>
+            <p:cNvPr id="43" name="图片 42">
+              <a:extLst>
+                <a:ext uri="{FF2B5EF4-FFF2-40B4-BE49-F238E27FC236}">
+                  <a16:creationId xmlns:a16="http://schemas.microsoft.com/office/drawing/2014/main" id="{92CDF1BC-C109-3DB8-9050-8BFC91E568EF}"/>
+                </a:ext>
+              </a:extLst>
+            </p:cNvPr>
+            <p:cNvPicPr>
+              <a:picLocks noChangeAspect="1"/>
+            </p:cNvPicPr>
+            <p:nvPr/>
+          </p:nvPicPr>
+          <p:blipFill>
+            <a:blip r:embed="rId12">
+              <a:extLst>
+                <a:ext uri="{28A0092B-C50C-407E-A947-70E740481C1C}">
+                  <a14:useLocalDpi xmlns:a14="http://schemas.microsoft.com/office/drawing/2010/main" val="0"/>
+                </a:ext>
+              </a:extLst>
+            </a:blip>
+            <a:stretch>
+              <a:fillRect/>
+            </a:stretch>
+          </p:blipFill>
+          <p:spPr>
+            <a:xfrm>
+              <a:off x="9577302" y="1165376"/>
+              <a:ext cx="1695878" cy="706616"/>
+            </a:xfrm>
+            <a:prstGeom prst="rect">
+              <a:avLst/>
+            </a:prstGeom>
+            <a:grpFill/>
+          </p:spPr>
+        </p:pic>
+      </p:grpSp>
     </p:spTree>
   </p:cSld>
   <p:clrMapOvr>

--- a/ppt_engine/templates/solution_fixed_modules/轨道交通地铁全封闭声屏障（M1_&_M2）.pptx
+++ b/ppt_engine/templates/solution_fixed_modules/轨道交通地铁全封闭声屏障（M1_&_M2）.pptx
@@ -13241,15 +13241,6 @@
             <a:spcPct val="100000"/>
           </a:lnSpc>
           <a:defRPr/>
-          <a:defRPr lang="zh-CN" altLang="en-US" sz="1400" b="1" dirty="0">
-            <a:solidFill>
-              <a:srgbClr val="333333"/>
-            </a:solidFill>
-            <a:latin typeface="Noto Sans SC Bold" pitchFamily="34" charset="0"/>
-            <a:ea typeface="Noto Sans SC Bold" pitchFamily="34" charset="-122"/>
-            <a:cs typeface="Noto Sans SC Bold" pitchFamily="34" charset="-120"/>
-            <a:sym typeface="+mn-ea"/>
-          </a:defRPr>
         </a:defPPr>
       </a:lstStyle>
     </a:spDef>
